--- a/module-03-grid-driving/slides/02-driving-multiple-intersections.pptx
+++ b/module-03-grid-driving/slides/02-driving-multiple-intersections.pptx
@@ -5,18 +5,18 @@
     <p:sldMasterId id="2147483648" r:id="rId1"/>
   </p:sldMasterIdLst>
   <p:sldIdLst>
-    <p:sldId id="256" r:id="rId7"/>
-    <p:sldId id="257" r:id="rId8"/>
-    <p:sldId id="258" r:id="rId9"/>
-    <p:sldId id="259" r:id="rId10"/>
-    <p:sldId id="260" r:id="rId11"/>
-    <p:sldId id="261" r:id="rId12"/>
-    <p:sldId id="262" r:id="rId13"/>
-    <p:sldId id="263" r:id="rId14"/>
-    <p:sldId id="264" r:id="rId15"/>
-    <p:sldId id="265" r:id="rId16"/>
+    <p:sldId id="256" r:id="rId2"/>
+    <p:sldId id="257" r:id="rId3"/>
+    <p:sldId id="267" r:id="rId4"/>
+    <p:sldId id="270" r:id="rId5"/>
+    <p:sldId id="271" r:id="rId6"/>
+    <p:sldId id="272" r:id="rId7"/>
+    <p:sldId id="262" r:id="rId8"/>
+    <p:sldId id="273" r:id="rId9"/>
+    <p:sldId id="264" r:id="rId10"/>
+    <p:sldId id="265" r:id="rId11"/>
   </p:sldIdLst>
-  <p:sldSz cx="12191695" cy="6858000" type="screen4x3"/>
+  <p:sldSz cx="12192000" cy="6858000"/>
   <p:notesSz cx="6858000" cy="9144000"/>
   <p:defaultTextStyle>
     <a:defPPr>
@@ -113,6 +113,22 @@
       </a:defRPr>
     </a:lvl9pPr>
   </p:defaultTextStyle>
+  <p:extLst>
+    <p:ext uri="{EFAFB233-063F-42B5-8137-9DF3F51BA10A}">
+      <p15:sldGuideLst xmlns:p15="http://schemas.microsoft.com/office/powerpoint/2012/main">
+        <p15:guide id="1" orient="horz" pos="2160">
+          <p15:clr>
+            <a:srgbClr val="A4A3A4"/>
+          </p15:clr>
+        </p15:guide>
+        <p15:guide id="2" pos="2880">
+          <p15:clr>
+            <a:srgbClr val="A4A3A4"/>
+          </p15:clr>
+        </p15:guide>
+      </p15:sldGuideLst>
+    </p:ext>
+  </p:extLst>
 </p:presentation>
 </file>
 
@@ -154,10 +170,9 @@
           <a:lstStyle/>
           <a:p>
             <a:r>
-              <a:rPr lang="en-US" smtClean="0"/>
+              <a:rPr lang="en-US"/>
               <a:t>Click to edit Master title style</a:t>
             </a:r>
-            <a:endParaRPr lang="en-US"/>
           </a:p>
         </p:txBody>
       </p:sp>
@@ -273,10 +288,9 @@
           </a:lstStyle>
           <a:p>
             <a:r>
-              <a:rPr lang="en-US" smtClean="0"/>
+              <a:rPr lang="en-US"/>
               <a:t>Click to edit Master subtitle style</a:t>
             </a:r>
-            <a:endParaRPr lang="en-US"/>
           </a:p>
         </p:txBody>
       </p:sp>
@@ -297,7 +311,7 @@
           <a:p>
             <a:fld id="{5BCAD085-E8A6-8845-BD4E-CB4CCA059FC4}" type="datetimeFigureOut">
               <a:rPr lang="en-US" smtClean="0"/>
-              <a:t>1/27/13</a:t>
+              <a:t>3/20/26</a:t>
             </a:fld>
             <a:endParaRPr lang="en-US"/>
           </a:p>
@@ -391,10 +405,9 @@
           <a:lstStyle/>
           <a:p>
             <a:r>
-              <a:rPr lang="en-US" smtClean="0"/>
+              <a:rPr lang="en-US"/>
               <a:t>Click to edit Master title style</a:t>
             </a:r>
-            <a:endParaRPr lang="en-US"/>
           </a:p>
         </p:txBody>
       </p:sp>
@@ -415,38 +428,37 @@
           <a:p>
             <a:pPr lvl="0"/>
             <a:r>
-              <a:rPr lang="en-US" smtClean="0"/>
+              <a:rPr lang="en-US"/>
               <a:t>Click to edit Master text styles</a:t>
             </a:r>
           </a:p>
           <a:p>
             <a:pPr lvl="1"/>
             <a:r>
-              <a:rPr lang="en-US" smtClean="0"/>
+              <a:rPr lang="en-US"/>
               <a:t>Second level</a:t>
             </a:r>
           </a:p>
           <a:p>
             <a:pPr lvl="2"/>
             <a:r>
-              <a:rPr lang="en-US" smtClean="0"/>
+              <a:rPr lang="en-US"/>
               <a:t>Third level</a:t>
             </a:r>
           </a:p>
           <a:p>
             <a:pPr lvl="3"/>
             <a:r>
-              <a:rPr lang="en-US" smtClean="0"/>
+              <a:rPr lang="en-US"/>
               <a:t>Fourth level</a:t>
             </a:r>
           </a:p>
           <a:p>
             <a:pPr lvl="4"/>
             <a:r>
-              <a:rPr lang="en-US" smtClean="0"/>
+              <a:rPr lang="en-US"/>
               <a:t>Fifth level</a:t>
             </a:r>
-            <a:endParaRPr lang="en-US"/>
           </a:p>
         </p:txBody>
       </p:sp>
@@ -467,7 +479,7 @@
           <a:p>
             <a:fld id="{5BCAD085-E8A6-8845-BD4E-CB4CCA059FC4}" type="datetimeFigureOut">
               <a:rPr lang="en-US" smtClean="0"/>
-              <a:t>1/27/13</a:t>
+              <a:t>3/20/26</a:t>
             </a:fld>
             <a:endParaRPr lang="en-US"/>
           </a:p>
@@ -566,10 +578,9 @@
           <a:lstStyle/>
           <a:p>
             <a:r>
-              <a:rPr lang="en-US" smtClean="0"/>
+              <a:rPr lang="en-US"/>
               <a:t>Click to edit Master title style</a:t>
             </a:r>
-            <a:endParaRPr lang="en-US"/>
           </a:p>
         </p:txBody>
       </p:sp>
@@ -595,38 +606,37 @@
           <a:p>
             <a:pPr lvl="0"/>
             <a:r>
-              <a:rPr lang="en-US" smtClean="0"/>
+              <a:rPr lang="en-US"/>
               <a:t>Click to edit Master text styles</a:t>
             </a:r>
           </a:p>
           <a:p>
             <a:pPr lvl="1"/>
             <a:r>
-              <a:rPr lang="en-US" smtClean="0"/>
+              <a:rPr lang="en-US"/>
               <a:t>Second level</a:t>
             </a:r>
           </a:p>
           <a:p>
             <a:pPr lvl="2"/>
             <a:r>
-              <a:rPr lang="en-US" smtClean="0"/>
+              <a:rPr lang="en-US"/>
               <a:t>Third level</a:t>
             </a:r>
           </a:p>
           <a:p>
             <a:pPr lvl="3"/>
             <a:r>
-              <a:rPr lang="en-US" smtClean="0"/>
+              <a:rPr lang="en-US"/>
               <a:t>Fourth level</a:t>
             </a:r>
           </a:p>
           <a:p>
             <a:pPr lvl="4"/>
             <a:r>
-              <a:rPr lang="en-US" smtClean="0"/>
+              <a:rPr lang="en-US"/>
               <a:t>Fifth level</a:t>
             </a:r>
-            <a:endParaRPr lang="en-US"/>
           </a:p>
         </p:txBody>
       </p:sp>
@@ -647,7 +657,7 @@
           <a:p>
             <a:fld id="{5BCAD085-E8A6-8845-BD4E-CB4CCA059FC4}" type="datetimeFigureOut">
               <a:rPr lang="en-US" smtClean="0"/>
-              <a:t>1/27/13</a:t>
+              <a:t>3/20/26</a:t>
             </a:fld>
             <a:endParaRPr lang="en-US"/>
           </a:p>
@@ -741,10 +751,9 @@
           <a:lstStyle/>
           <a:p>
             <a:r>
-              <a:rPr lang="en-US" smtClean="0"/>
+              <a:rPr lang="en-US"/>
               <a:t>Click to edit Master title style</a:t>
             </a:r>
-            <a:endParaRPr lang="en-US"/>
           </a:p>
         </p:txBody>
       </p:sp>
@@ -765,38 +774,37 @@
           <a:p>
             <a:pPr lvl="0"/>
             <a:r>
-              <a:rPr lang="en-US" smtClean="0"/>
+              <a:rPr lang="en-US"/>
               <a:t>Click to edit Master text styles</a:t>
             </a:r>
           </a:p>
           <a:p>
             <a:pPr lvl="1"/>
             <a:r>
-              <a:rPr lang="en-US" smtClean="0"/>
+              <a:rPr lang="en-US"/>
               <a:t>Second level</a:t>
             </a:r>
           </a:p>
           <a:p>
             <a:pPr lvl="2"/>
             <a:r>
-              <a:rPr lang="en-US" smtClean="0"/>
+              <a:rPr lang="en-US"/>
               <a:t>Third level</a:t>
             </a:r>
           </a:p>
           <a:p>
             <a:pPr lvl="3"/>
             <a:r>
-              <a:rPr lang="en-US" smtClean="0"/>
+              <a:rPr lang="en-US"/>
               <a:t>Fourth level</a:t>
             </a:r>
           </a:p>
           <a:p>
             <a:pPr lvl="4"/>
             <a:r>
-              <a:rPr lang="en-US" smtClean="0"/>
+              <a:rPr lang="en-US"/>
               <a:t>Fifth level</a:t>
             </a:r>
-            <a:endParaRPr lang="en-US"/>
           </a:p>
         </p:txBody>
       </p:sp>
@@ -817,7 +825,7 @@
           <a:p>
             <a:fld id="{5BCAD085-E8A6-8845-BD4E-CB4CCA059FC4}" type="datetimeFigureOut">
               <a:rPr lang="en-US" smtClean="0"/>
-              <a:t>1/27/13</a:t>
+              <a:t>3/20/26</a:t>
             </a:fld>
             <a:endParaRPr lang="en-US"/>
           </a:p>
@@ -920,10 +928,9 @@
           </a:lstStyle>
           <a:p>
             <a:r>
-              <a:rPr lang="en-US" smtClean="0"/>
+              <a:rPr lang="en-US"/>
               <a:t>Click to edit Master title style</a:t>
             </a:r>
-            <a:endParaRPr lang="en-US"/>
           </a:p>
         </p:txBody>
       </p:sp>
@@ -1040,7 +1047,7 @@
           <a:p>
             <a:pPr lvl="0"/>
             <a:r>
-              <a:rPr lang="en-US" smtClean="0"/>
+              <a:rPr lang="en-US"/>
               <a:t>Click to edit Master text styles</a:t>
             </a:r>
           </a:p>
@@ -1063,7 +1070,7 @@
           <a:p>
             <a:fld id="{5BCAD085-E8A6-8845-BD4E-CB4CCA059FC4}" type="datetimeFigureOut">
               <a:rPr lang="en-US" smtClean="0"/>
-              <a:t>1/27/13</a:t>
+              <a:t>3/20/26</a:t>
             </a:fld>
             <a:endParaRPr lang="en-US"/>
           </a:p>
@@ -1157,10 +1164,9 @@
           <a:lstStyle/>
           <a:p>
             <a:r>
-              <a:rPr lang="en-US" smtClean="0"/>
+              <a:rPr lang="en-US"/>
               <a:t>Click to edit Master title style</a:t>
             </a:r>
-            <a:endParaRPr lang="en-US"/>
           </a:p>
         </p:txBody>
       </p:sp>
@@ -1214,38 +1220,37 @@
           <a:p>
             <a:pPr lvl="0"/>
             <a:r>
-              <a:rPr lang="en-US" smtClean="0"/>
+              <a:rPr lang="en-US"/>
               <a:t>Click to edit Master text styles</a:t>
             </a:r>
           </a:p>
           <a:p>
             <a:pPr lvl="1"/>
             <a:r>
-              <a:rPr lang="en-US" smtClean="0"/>
+              <a:rPr lang="en-US"/>
               <a:t>Second level</a:t>
             </a:r>
           </a:p>
           <a:p>
             <a:pPr lvl="2"/>
             <a:r>
-              <a:rPr lang="en-US" smtClean="0"/>
+              <a:rPr lang="en-US"/>
               <a:t>Third level</a:t>
             </a:r>
           </a:p>
           <a:p>
             <a:pPr lvl="3"/>
             <a:r>
-              <a:rPr lang="en-US" smtClean="0"/>
+              <a:rPr lang="en-US"/>
               <a:t>Fourth level</a:t>
             </a:r>
           </a:p>
           <a:p>
             <a:pPr lvl="4"/>
             <a:r>
-              <a:rPr lang="en-US" smtClean="0"/>
+              <a:rPr lang="en-US"/>
               <a:t>Fifth level</a:t>
             </a:r>
-            <a:endParaRPr lang="en-US"/>
           </a:p>
         </p:txBody>
       </p:sp>
@@ -1299,38 +1304,37 @@
           <a:p>
             <a:pPr lvl="0"/>
             <a:r>
-              <a:rPr lang="en-US" smtClean="0"/>
+              <a:rPr lang="en-US"/>
               <a:t>Click to edit Master text styles</a:t>
             </a:r>
           </a:p>
           <a:p>
             <a:pPr lvl="1"/>
             <a:r>
-              <a:rPr lang="en-US" smtClean="0"/>
+              <a:rPr lang="en-US"/>
               <a:t>Second level</a:t>
             </a:r>
           </a:p>
           <a:p>
             <a:pPr lvl="2"/>
             <a:r>
-              <a:rPr lang="en-US" smtClean="0"/>
+              <a:rPr lang="en-US"/>
               <a:t>Third level</a:t>
             </a:r>
           </a:p>
           <a:p>
             <a:pPr lvl="3"/>
             <a:r>
-              <a:rPr lang="en-US" smtClean="0"/>
+              <a:rPr lang="en-US"/>
               <a:t>Fourth level</a:t>
             </a:r>
           </a:p>
           <a:p>
             <a:pPr lvl="4"/>
             <a:r>
-              <a:rPr lang="en-US" smtClean="0"/>
+              <a:rPr lang="en-US"/>
               <a:t>Fifth level</a:t>
             </a:r>
-            <a:endParaRPr lang="en-US"/>
           </a:p>
         </p:txBody>
       </p:sp>
@@ -1351,7 +1355,7 @@
           <a:p>
             <a:fld id="{5BCAD085-E8A6-8845-BD4E-CB4CCA059FC4}" type="datetimeFigureOut">
               <a:rPr lang="en-US" smtClean="0"/>
-              <a:t>1/27/13</a:t>
+              <a:t>3/20/26</a:t>
             </a:fld>
             <a:endParaRPr lang="en-US"/>
           </a:p>
@@ -1449,10 +1453,9 @@
           </a:lstStyle>
           <a:p>
             <a:r>
-              <a:rPr lang="en-US" smtClean="0"/>
+              <a:rPr lang="en-US"/>
               <a:t>Click to edit Master title style</a:t>
             </a:r>
-            <a:endParaRPr lang="en-US"/>
           </a:p>
         </p:txBody>
       </p:sp>
@@ -1515,7 +1518,7 @@
           <a:p>
             <a:pPr lvl="0"/>
             <a:r>
-              <a:rPr lang="en-US" smtClean="0"/>
+              <a:rPr lang="en-US"/>
               <a:t>Click to edit Master text styles</a:t>
             </a:r>
           </a:p>
@@ -1571,38 +1574,37 @@
           <a:p>
             <a:pPr lvl="0"/>
             <a:r>
-              <a:rPr lang="en-US" smtClean="0"/>
+              <a:rPr lang="en-US"/>
               <a:t>Click to edit Master text styles</a:t>
             </a:r>
           </a:p>
           <a:p>
             <a:pPr lvl="1"/>
             <a:r>
-              <a:rPr lang="en-US" smtClean="0"/>
+              <a:rPr lang="en-US"/>
               <a:t>Second level</a:t>
             </a:r>
           </a:p>
           <a:p>
             <a:pPr lvl="2"/>
             <a:r>
-              <a:rPr lang="en-US" smtClean="0"/>
+              <a:rPr lang="en-US"/>
               <a:t>Third level</a:t>
             </a:r>
           </a:p>
           <a:p>
             <a:pPr lvl="3"/>
             <a:r>
-              <a:rPr lang="en-US" smtClean="0"/>
+              <a:rPr lang="en-US"/>
               <a:t>Fourth level</a:t>
             </a:r>
           </a:p>
           <a:p>
             <a:pPr lvl="4"/>
             <a:r>
-              <a:rPr lang="en-US" smtClean="0"/>
+              <a:rPr lang="en-US"/>
               <a:t>Fifth level</a:t>
             </a:r>
-            <a:endParaRPr lang="en-US"/>
           </a:p>
         </p:txBody>
       </p:sp>
@@ -1665,7 +1667,7 @@
           <a:p>
             <a:pPr lvl="0"/>
             <a:r>
-              <a:rPr lang="en-US" smtClean="0"/>
+              <a:rPr lang="en-US"/>
               <a:t>Click to edit Master text styles</a:t>
             </a:r>
           </a:p>
@@ -1721,38 +1723,37 @@
           <a:p>
             <a:pPr lvl="0"/>
             <a:r>
-              <a:rPr lang="en-US" smtClean="0"/>
+              <a:rPr lang="en-US"/>
               <a:t>Click to edit Master text styles</a:t>
             </a:r>
           </a:p>
           <a:p>
             <a:pPr lvl="1"/>
             <a:r>
-              <a:rPr lang="en-US" smtClean="0"/>
+              <a:rPr lang="en-US"/>
               <a:t>Second level</a:t>
             </a:r>
           </a:p>
           <a:p>
             <a:pPr lvl="2"/>
             <a:r>
-              <a:rPr lang="en-US" smtClean="0"/>
+              <a:rPr lang="en-US"/>
               <a:t>Third level</a:t>
             </a:r>
           </a:p>
           <a:p>
             <a:pPr lvl="3"/>
             <a:r>
-              <a:rPr lang="en-US" smtClean="0"/>
+              <a:rPr lang="en-US"/>
               <a:t>Fourth level</a:t>
             </a:r>
           </a:p>
           <a:p>
             <a:pPr lvl="4"/>
             <a:r>
-              <a:rPr lang="en-US" smtClean="0"/>
+              <a:rPr lang="en-US"/>
               <a:t>Fifth level</a:t>
             </a:r>
-            <a:endParaRPr lang="en-US"/>
           </a:p>
         </p:txBody>
       </p:sp>
@@ -1773,7 +1774,7 @@
           <a:p>
             <a:fld id="{5BCAD085-E8A6-8845-BD4E-CB4CCA059FC4}" type="datetimeFigureOut">
               <a:rPr lang="en-US" smtClean="0"/>
-              <a:t>1/27/13</a:t>
+              <a:t>3/20/26</a:t>
             </a:fld>
             <a:endParaRPr lang="en-US"/>
           </a:p>
@@ -1867,10 +1868,9 @@
           <a:lstStyle/>
           <a:p>
             <a:r>
-              <a:rPr lang="en-US" smtClean="0"/>
+              <a:rPr lang="en-US"/>
               <a:t>Click to edit Master title style</a:t>
             </a:r>
-            <a:endParaRPr lang="en-US"/>
           </a:p>
         </p:txBody>
       </p:sp>
@@ -1891,7 +1891,7 @@
           <a:p>
             <a:fld id="{5BCAD085-E8A6-8845-BD4E-CB4CCA059FC4}" type="datetimeFigureOut">
               <a:rPr lang="en-US" smtClean="0"/>
-              <a:t>1/27/13</a:t>
+              <a:t>3/20/26</a:t>
             </a:fld>
             <a:endParaRPr lang="en-US"/>
           </a:p>
@@ -1986,7 +1986,7 @@
           <a:p>
             <a:fld id="{5BCAD085-E8A6-8845-BD4E-CB4CCA059FC4}" type="datetimeFigureOut">
               <a:rPr lang="en-US" smtClean="0"/>
-              <a:t>1/27/13</a:t>
+              <a:t>3/20/26</a:t>
             </a:fld>
             <a:endParaRPr lang="en-US"/>
           </a:p>
@@ -2089,10 +2089,9 @@
           </a:lstStyle>
           <a:p>
             <a:r>
-              <a:rPr lang="en-US" smtClean="0"/>
+              <a:rPr lang="en-US"/>
               <a:t>Click to edit Master title style</a:t>
             </a:r>
-            <a:endParaRPr lang="en-US"/>
           </a:p>
         </p:txBody>
       </p:sp>
@@ -2146,38 +2145,37 @@
           <a:p>
             <a:pPr lvl="0"/>
             <a:r>
-              <a:rPr lang="en-US" smtClean="0"/>
+              <a:rPr lang="en-US"/>
               <a:t>Click to edit Master text styles</a:t>
             </a:r>
           </a:p>
           <a:p>
             <a:pPr lvl="1"/>
             <a:r>
-              <a:rPr lang="en-US" smtClean="0"/>
+              <a:rPr lang="en-US"/>
               <a:t>Second level</a:t>
             </a:r>
           </a:p>
           <a:p>
             <a:pPr lvl="2"/>
             <a:r>
-              <a:rPr lang="en-US" smtClean="0"/>
+              <a:rPr lang="en-US"/>
               <a:t>Third level</a:t>
             </a:r>
           </a:p>
           <a:p>
             <a:pPr lvl="3"/>
             <a:r>
-              <a:rPr lang="en-US" smtClean="0"/>
+              <a:rPr lang="en-US"/>
               <a:t>Fourth level</a:t>
             </a:r>
           </a:p>
           <a:p>
             <a:pPr lvl="4"/>
             <a:r>
-              <a:rPr lang="en-US" smtClean="0"/>
+              <a:rPr lang="en-US"/>
               <a:t>Fifth level</a:t>
             </a:r>
-            <a:endParaRPr lang="en-US"/>
           </a:p>
         </p:txBody>
       </p:sp>
@@ -2240,7 +2238,7 @@
           <a:p>
             <a:pPr lvl="0"/>
             <a:r>
-              <a:rPr lang="en-US" smtClean="0"/>
+              <a:rPr lang="en-US"/>
               <a:t>Click to edit Master text styles</a:t>
             </a:r>
           </a:p>
@@ -2263,7 +2261,7 @@
           <a:p>
             <a:fld id="{5BCAD085-E8A6-8845-BD4E-CB4CCA059FC4}" type="datetimeFigureOut">
               <a:rPr lang="en-US" smtClean="0"/>
-              <a:t>1/27/13</a:t>
+              <a:t>3/20/26</a:t>
             </a:fld>
             <a:endParaRPr lang="en-US"/>
           </a:p>
@@ -2366,10 +2364,9 @@
           </a:lstStyle>
           <a:p>
             <a:r>
-              <a:rPr lang="en-US" smtClean="0"/>
+              <a:rPr lang="en-US"/>
               <a:t>Click to edit Master title style</a:t>
             </a:r>
-            <a:endParaRPr lang="en-US"/>
           </a:p>
         </p:txBody>
       </p:sp>
@@ -2493,7 +2490,7 @@
           <a:p>
             <a:pPr lvl="0"/>
             <a:r>
-              <a:rPr lang="en-US" smtClean="0"/>
+              <a:rPr lang="en-US"/>
               <a:t>Click to edit Master text styles</a:t>
             </a:r>
           </a:p>
@@ -2516,7 +2513,7 @@
           <a:p>
             <a:fld id="{5BCAD085-E8A6-8845-BD4E-CB4CCA059FC4}" type="datetimeFigureOut">
               <a:rPr lang="en-US" smtClean="0"/>
-              <a:t>1/27/13</a:t>
+              <a:t>3/20/26</a:t>
             </a:fld>
             <a:endParaRPr lang="en-US"/>
           </a:p>
@@ -2625,10 +2622,9 @@
           <a:lstStyle/>
           <a:p>
             <a:r>
-              <a:rPr lang="en-US" smtClean="0"/>
+              <a:rPr lang="en-US"/>
               <a:t>Click to edit Master title style</a:t>
             </a:r>
-            <a:endParaRPr lang="en-US"/>
           </a:p>
         </p:txBody>
       </p:sp>
@@ -2659,38 +2655,37 @@
           <a:p>
             <a:pPr lvl="0"/>
             <a:r>
-              <a:rPr lang="en-US" smtClean="0"/>
+              <a:rPr lang="en-US"/>
               <a:t>Click to edit Master text styles</a:t>
             </a:r>
           </a:p>
           <a:p>
             <a:pPr lvl="1"/>
             <a:r>
-              <a:rPr lang="en-US" smtClean="0"/>
+              <a:rPr lang="en-US"/>
               <a:t>Second level</a:t>
             </a:r>
           </a:p>
           <a:p>
             <a:pPr lvl="2"/>
             <a:r>
-              <a:rPr lang="en-US" smtClean="0"/>
+              <a:rPr lang="en-US"/>
               <a:t>Third level</a:t>
             </a:r>
           </a:p>
           <a:p>
             <a:pPr lvl="3"/>
             <a:r>
-              <a:rPr lang="en-US" smtClean="0"/>
+              <a:rPr lang="en-US"/>
               <a:t>Fourth level</a:t>
             </a:r>
           </a:p>
           <a:p>
             <a:pPr lvl="4"/>
             <a:r>
-              <a:rPr lang="en-US" smtClean="0"/>
+              <a:rPr lang="en-US"/>
               <a:t>Fifth level</a:t>
             </a:r>
-            <a:endParaRPr lang="en-US"/>
           </a:p>
         </p:txBody>
       </p:sp>
@@ -2729,7 +2724,7 @@
           <a:p>
             <a:fld id="{5BCAD085-E8A6-8845-BD4E-CB4CCA059FC4}" type="datetimeFigureOut">
               <a:rPr lang="en-US" smtClean="0"/>
-              <a:t>1/27/13</a:t>
+              <a:t>3/20/26</a:t>
             </a:fld>
             <a:endParaRPr lang="en-US"/>
           </a:p>
@@ -3088,7 +3083,7 @@
 </file>
 
 <file path=ppt/slides/slide1.xml><?xml version="1.0" encoding="utf-8"?>
-<p:sld xmlns:a="http://schemas.openxmlformats.org/drawingml/2006/main" xmlns:p="http://schemas.openxmlformats.org/presentationml/2006/main" xmlns:r="http://schemas.openxmlformats.org/officeDocument/2006/relationships">
+<p:sld xmlns:a="http://schemas.openxmlformats.org/drawingml/2006/main" xmlns:r="http://schemas.openxmlformats.org/officeDocument/2006/relationships" xmlns:p="http://schemas.openxmlformats.org/presentationml/2006/main">
   <p:cSld>
     <p:spTree>
       <p:nvGrpSpPr>
@@ -3096,7 +3091,14 @@
         <p:cNvGrpSpPr/>
         <p:nvPr/>
       </p:nvGrpSpPr>
-      <p:grpSpPr/>
+      <p:grpSpPr>
+        <a:xfrm>
+          <a:off x="0" y="0"/>
+          <a:ext cx="0" cy="0"/>
+          <a:chOff x="0" y="0"/>
+          <a:chExt cx="0" cy="0"/>
+        </a:xfrm>
+      </p:grpSpPr>
       <p:sp>
         <p:nvSpPr>
           <p:cNvPr id="2" name="Rectangle 1"/>
@@ -3137,6 +3139,7 @@
           <a:lstStyle/>
           <a:p>
             <a:pPr algn="ctr"/>
+            <a:endParaRPr/>
           </a:p>
         </p:txBody>
       </p:sp>
@@ -3421,7 +3424,7 @@
 </file>
 
 <file path=ppt/slides/slide10.xml><?xml version="1.0" encoding="utf-8"?>
-<p:sld xmlns:a="http://schemas.openxmlformats.org/drawingml/2006/main" xmlns:p="http://schemas.openxmlformats.org/presentationml/2006/main" xmlns:r="http://schemas.openxmlformats.org/officeDocument/2006/relationships">
+<p:sld xmlns:a="http://schemas.openxmlformats.org/drawingml/2006/main" xmlns:r="http://schemas.openxmlformats.org/officeDocument/2006/relationships" xmlns:p="http://schemas.openxmlformats.org/presentationml/2006/main">
   <p:cSld>
     <p:spTree>
       <p:nvGrpSpPr>
@@ -3429,7 +3432,14 @@
         <p:cNvGrpSpPr/>
         <p:nvPr/>
       </p:nvGrpSpPr>
-      <p:grpSpPr/>
+      <p:grpSpPr>
+        <a:xfrm>
+          <a:off x="0" y="0"/>
+          <a:ext cx="0" cy="0"/>
+          <a:chOff x="0" y="0"/>
+          <a:chExt cx="0" cy="0"/>
+        </a:xfrm>
+      </p:grpSpPr>
       <p:sp>
         <p:nvSpPr>
           <p:cNvPr id="2" name="Rectangle 1"/>
@@ -3470,6 +3480,7 @@
           <a:lstStyle/>
           <a:p>
             <a:pPr algn="ctr"/>
+            <a:endParaRPr/>
           </a:p>
         </p:txBody>
       </p:sp>
@@ -3606,6 +3617,7 @@
                 <a:latin typeface="Calibri"/>
               </a:defRPr>
             </a:pPr>
+            <a:endParaRPr/>
           </a:p>
           <a:p>
             <a:pPr>
@@ -3683,6 +3695,7 @@
                 <a:latin typeface="Calibri"/>
               </a:defRPr>
             </a:pPr>
+            <a:endParaRPr/>
           </a:p>
           <a:p>
             <a:pPr>
@@ -3711,7 +3724,7 @@
 </file>
 
 <file path=ppt/slides/slide2.xml><?xml version="1.0" encoding="utf-8"?>
-<p:sld xmlns:a="http://schemas.openxmlformats.org/drawingml/2006/main" xmlns:p="http://schemas.openxmlformats.org/presentationml/2006/main" xmlns:r="http://schemas.openxmlformats.org/officeDocument/2006/relationships">
+<p:sld xmlns:a="http://schemas.openxmlformats.org/drawingml/2006/main" xmlns:r="http://schemas.openxmlformats.org/officeDocument/2006/relationships" xmlns:p="http://schemas.openxmlformats.org/presentationml/2006/main">
   <p:cSld>
     <p:spTree>
       <p:nvGrpSpPr>
@@ -3719,7 +3732,14 @@
         <p:cNvGrpSpPr/>
         <p:nvPr/>
       </p:nvGrpSpPr>
-      <p:grpSpPr/>
+      <p:grpSpPr>
+        <a:xfrm>
+          <a:off x="0" y="0"/>
+          <a:ext cx="0" cy="0"/>
+          <a:chOff x="0" y="0"/>
+          <a:chExt cx="0" cy="0"/>
+        </a:xfrm>
+      </p:grpSpPr>
       <p:sp>
         <p:nvSpPr>
           <p:cNvPr id="2" name="Rectangle 1"/>
@@ -3760,6 +3780,7 @@
           <a:lstStyle/>
           <a:p>
             <a:pPr algn="ctr"/>
+            <a:endParaRPr/>
           </a:p>
         </p:txBody>
       </p:sp>
@@ -3848,6 +3869,7 @@
                 <a:latin typeface="Calibri"/>
               </a:defRPr>
             </a:pPr>
+            <a:endParaRPr/>
           </a:p>
           <a:p>
             <a:pPr>
@@ -3893,6 +3915,7 @@
                 <a:latin typeface="Calibri"/>
               </a:defRPr>
             </a:pPr>
+            <a:endParaRPr/>
           </a:p>
           <a:p>
             <a:pPr>
@@ -3922,6 +3945,7 @@
                 <a:latin typeface="Calibri"/>
               </a:defRPr>
             </a:pPr>
+            <a:endParaRPr/>
           </a:p>
           <a:p>
             <a:pPr>
@@ -3951,6 +3975,7 @@
                 <a:latin typeface="Calibri"/>
               </a:defRPr>
             </a:pPr>
+            <a:endParaRPr/>
           </a:p>
         </p:txBody>
       </p:sp>
@@ -3963,7 +3988,7 @@
 </file>
 
 <file path=ppt/slides/slide3.xml><?xml version="1.0" encoding="utf-8"?>
-<p:sld xmlns:a="http://schemas.openxmlformats.org/drawingml/2006/main" xmlns:p="http://schemas.openxmlformats.org/presentationml/2006/main" xmlns:r="http://schemas.openxmlformats.org/officeDocument/2006/relationships">
+<p:sld xmlns:a="http://schemas.openxmlformats.org/drawingml/2006/main" xmlns:r="http://schemas.openxmlformats.org/officeDocument/2006/relationships" xmlns:p="http://schemas.openxmlformats.org/presentationml/2006/main">
   <p:cSld>
     <p:spTree>
       <p:nvGrpSpPr>
@@ -3971,7 +3996,14 @@
         <p:cNvGrpSpPr/>
         <p:nvPr/>
       </p:nvGrpSpPr>
-      <p:grpSpPr/>
+      <p:grpSpPr>
+        <a:xfrm>
+          <a:off x="0" y="0"/>
+          <a:ext cx="0" cy="0"/>
+          <a:chOff x="0" y="0"/>
+          <a:chExt cx="0" cy="0"/>
+        </a:xfrm>
+      </p:grpSpPr>
       <p:sp>
         <p:nvSpPr>
           <p:cNvPr id="2" name="Rectangle 1"/>
@@ -4012,6 +4044,7 @@
           <a:lstStyle/>
           <a:p>
             <a:pPr algn="ctr"/>
+            <a:endParaRPr/>
           </a:p>
         </p:txBody>
       </p:sp>
@@ -4089,25 +4122,594 @@
       </p:sp>
       <p:sp>
         <p:nvSpPr>
-          <p:cNvPr id="5" name="Rounded Rectangle 4"/>
+          <p:cNvPr id="7" name="TextBox 6"/>
+          <p:cNvSpPr txBox="1"/>
+          <p:nvPr/>
+        </p:nvSpPr>
+        <p:spPr>
+          <a:xfrm>
+            <a:off x="6731000" y="1968500"/>
+            <a:ext cx="4953000" cy="4572000"/>
+          </a:xfrm>
+          <a:prstGeom prst="rect">
+            <a:avLst/>
+          </a:prstGeom>
+          <a:noFill/>
+        </p:spPr>
+        <p:txBody>
+          <a:bodyPr wrap="square">
+            <a:spAutoFit/>
+          </a:bodyPr>
+          <a:lstStyle/>
+          <a:p>
+            <a:pPr>
+              <a:defRPr sz="1800" b="1">
+                <a:solidFill>
+                  <a:srgbClr val="1B3A5C"/>
+                </a:solidFill>
+                <a:latin typeface="Calibri"/>
+              </a:defRPr>
+            </a:pPr>
+            <a:r>
+              <a:t>If we call track_until_cross() again:</a:t>
+            </a:r>
+          </a:p>
+          <a:p>
+            <a:pPr>
+              <a:spcAft>
+                <a:spcPts val="400"/>
+              </a:spcAft>
+              <a:defRPr sz="1600" b="0">
+                <a:solidFill>
+                  <a:srgbClr val="000000"/>
+                </a:solidFill>
+                <a:latin typeface="Calibri"/>
+              </a:defRPr>
+            </a:pPr>
+            <a:r>
+              <a:t>Both sensors are already above threshold</a:t>
+            </a:r>
+          </a:p>
+          <a:p>
+            <a:pPr>
+              <a:spcAft>
+                <a:spcPts val="400"/>
+              </a:spcAft>
+              <a:defRPr sz="1600" b="0">
+                <a:solidFill>
+                  <a:srgbClr val="000000"/>
+                </a:solidFill>
+                <a:latin typeface="Calibri"/>
+              </a:defRPr>
+            </a:pPr>
+            <a:r>
+              <a:t>is_at_cross() returns True immediately</a:t>
+            </a:r>
+          </a:p>
+          <a:p>
+            <a:pPr>
+              <a:spcAft>
+                <a:spcPts val="400"/>
+              </a:spcAft>
+              <a:defRPr sz="1600" b="0">
+                <a:solidFill>
+                  <a:srgbClr val="000000"/>
+                </a:solidFill>
+                <a:latin typeface="Calibri"/>
+              </a:defRPr>
+            </a:pPr>
+            <a:r>
+              <a:t>The robot "detects" the intersection it's already on!</a:t>
+            </a:r>
+          </a:p>
+          <a:p>
+            <a:pPr>
+              <a:spcAft>
+                <a:spcPts val="400"/>
+              </a:spcAft>
+              <a:defRPr sz="1800" b="1">
+                <a:solidFill>
+                  <a:srgbClr val="1B3A5C"/>
+                </a:solidFill>
+                <a:latin typeface="Calibri"/>
+              </a:defRPr>
+            </a:pPr>
+            <a:r>
+              <a:t>Solution: Drive forward briefly to move PAST the cross.</a:t>
+            </a:r>
+          </a:p>
+        </p:txBody>
+      </p:sp>
+      <p:sp>
+        <p:nvSpPr>
+          <p:cNvPr id="100" name="Road H"/>
           <p:cNvSpPr/>
           <p:nvPr/>
         </p:nvSpPr>
         <p:spPr>
           <a:xfrm>
-            <a:off x="548640" y="1645920"/>
-            <a:ext cx="5669280" cy="1417320"/>
-          </a:xfrm>
-          <a:prstGeom prst="roundRect">
+            <a:off x="1524000" y="3937000"/>
+            <a:ext cx="3810000" cy="762000"/>
+          </a:xfrm>
+          <a:prstGeom prst="rect">
             <a:avLst/>
           </a:prstGeom>
           <a:solidFill>
-            <a:srgbClr val="F0F0F0"/>
+            <a:srgbClr val="D9D9D9"/>
+          </a:solidFill>
+          <a:ln w="0">
+            <a:noFill/>
+          </a:ln>
+        </p:spPr>
+        <p:txBody>
+          <a:bodyPr/>
+          <a:lstStyle/>
+          <a:p>
+            <a:endParaRPr/>
+          </a:p>
+        </p:txBody>
+      </p:sp>
+      <p:sp>
+        <p:nvSpPr>
+          <p:cNvPr id="101" name="Road V"/>
+          <p:cNvSpPr/>
+          <p:nvPr/>
+        </p:nvSpPr>
+        <p:spPr>
+          <a:xfrm>
+            <a:off x="3048000" y="2413000"/>
+            <a:ext cx="762000" cy="3810000"/>
+          </a:xfrm>
+          <a:prstGeom prst="rect">
+            <a:avLst/>
+          </a:prstGeom>
+          <a:solidFill>
+            <a:srgbClr val="D9D9D9"/>
+          </a:solidFill>
+          <a:ln w="0">
+            <a:noFill/>
+          </a:ln>
+        </p:spPr>
+        <p:txBody>
+          <a:bodyPr/>
+          <a:lstStyle/>
+          <a:p>
+            <a:endParaRPr/>
+          </a:p>
+        </p:txBody>
+      </p:sp>
+      <p:cxnSp>
+        <p:nvCxnSpPr>
+          <p:cNvPr id="102" name="Line Left"/>
+          <p:cNvCxnSpPr/>
+          <p:nvPr/>
+        </p:nvCxnSpPr>
+        <p:spPr>
+          <a:xfrm>
+            <a:off x="1587500" y="4318000"/>
+            <a:ext cx="1460500" cy="0"/>
+          </a:xfrm>
+          <a:prstGeom prst="line">
+            <a:avLst/>
+          </a:prstGeom>
+          <a:ln w="76200" cap="rnd">
+            <a:solidFill>
+              <a:srgbClr val="1B3A5C"/>
+            </a:solidFill>
+            <a:round/>
+          </a:ln>
+        </p:spPr>
+      </p:cxnSp>
+      <p:cxnSp>
+        <p:nvCxnSpPr>
+          <p:cNvPr id="103" name="Line Right"/>
+          <p:cNvCxnSpPr/>
+          <p:nvPr/>
+        </p:nvCxnSpPr>
+        <p:spPr>
+          <a:xfrm>
+            <a:off x="3619500" y="4318000"/>
+            <a:ext cx="1460500" cy="0"/>
+          </a:xfrm>
+          <a:prstGeom prst="line">
+            <a:avLst/>
+          </a:prstGeom>
+          <a:ln w="76200" cap="rnd">
+            <a:solidFill>
+              <a:srgbClr val="1B3A5C"/>
+            </a:solidFill>
+            <a:round/>
+          </a:ln>
+        </p:spPr>
+      </p:cxnSp>
+      <p:cxnSp>
+        <p:nvCxnSpPr>
+          <p:cNvPr id="104" name="Line Top"/>
+          <p:cNvCxnSpPr/>
+          <p:nvPr/>
+        </p:nvCxnSpPr>
+        <p:spPr>
+          <a:xfrm>
+            <a:off x="3429000" y="2476500"/>
+            <a:ext cx="0" cy="1460500"/>
+          </a:xfrm>
+          <a:prstGeom prst="line">
+            <a:avLst/>
+          </a:prstGeom>
+          <a:ln w="76200" cap="rnd">
+            <a:solidFill>
+              <a:srgbClr val="1B3A5C"/>
+            </a:solidFill>
+            <a:round/>
+          </a:ln>
+        </p:spPr>
+      </p:cxnSp>
+      <p:cxnSp>
+        <p:nvCxnSpPr>
+          <p:cNvPr id="105" name="Line Bottom"/>
+          <p:cNvCxnSpPr/>
+          <p:nvPr/>
+        </p:nvCxnSpPr>
+        <p:spPr>
+          <a:xfrm>
+            <a:off x="3429000" y="4508500"/>
+            <a:ext cx="0" cy="1460500"/>
+          </a:xfrm>
+          <a:prstGeom prst="line">
+            <a:avLst/>
+          </a:prstGeom>
+          <a:ln w="76200" cap="rnd">
+            <a:solidFill>
+              <a:srgbClr val="1B3A5C"/>
+            </a:solidFill>
+            <a:round/>
+          </a:ln>
+        </p:spPr>
+      </p:cxnSp>
+      <p:sp>
+        <p:nvSpPr>
+          <p:cNvPr id="106" name="Label"/>
+          <p:cNvSpPr/>
+          <p:nvPr/>
+        </p:nvSpPr>
+        <p:spPr>
+          <a:xfrm>
+            <a:off x="863600" y="4140200"/>
+            <a:ext cx="508000" cy="355600"/>
+          </a:xfrm>
+          <a:prstGeom prst="rect">
+            <a:avLst/>
+          </a:prstGeom>
+          <a:noFill/>
+          <a:ln w="0">
+            <a:noFill/>
+          </a:ln>
+        </p:spPr>
+        <p:txBody>
+          <a:bodyPr wrap="none" lIns="0" tIns="0" rIns="0" bIns="0" anchor="ctr"/>
+          <a:lstStyle/>
+          <a:p>
+            <a:pPr algn="ctr"/>
+            <a:r>
+              <a:rPr lang="en-US" sz="1400" b="1" dirty="0">
+                <a:solidFill>
+                  <a:srgbClr val="1B3A5C"/>
+                </a:solidFill>
+                <a:latin typeface="Calibri"/>
+              </a:rPr>
+              <a:t>Line</a:t>
+            </a:r>
+          </a:p>
+        </p:txBody>
+      </p:sp>
+      <p:sp>
+        <p:nvSpPr>
+          <p:cNvPr id="107" name="Label"/>
+          <p:cNvSpPr/>
+          <p:nvPr/>
+        </p:nvSpPr>
+        <p:spPr>
+          <a:xfrm>
+            <a:off x="5334000" y="4140200"/>
+            <a:ext cx="508000" cy="355600"/>
+          </a:xfrm>
+          <a:prstGeom prst="rect">
+            <a:avLst/>
+          </a:prstGeom>
+          <a:noFill/>
+          <a:ln w="0">
+            <a:noFill/>
+          </a:ln>
+        </p:spPr>
+        <p:txBody>
+          <a:bodyPr wrap="none" lIns="0" tIns="0" rIns="0" bIns="0" anchor="ctr"/>
+          <a:lstStyle/>
+          <a:p>
+            <a:pPr algn="ctr"/>
+            <a:r>
+              <a:rPr lang="en-US" sz="1400" b="1" dirty="0">
+                <a:solidFill>
+                  <a:srgbClr val="1B3A5C"/>
+                </a:solidFill>
+                <a:latin typeface="Calibri"/>
+              </a:rPr>
+              <a:t>Line</a:t>
+            </a:r>
+          </a:p>
+        </p:txBody>
+      </p:sp>
+      <p:sp>
+        <p:nvSpPr>
+          <p:cNvPr id="108" name="Label"/>
+          <p:cNvSpPr/>
+          <p:nvPr/>
+        </p:nvSpPr>
+        <p:spPr>
+          <a:xfrm>
+            <a:off x="3175000" y="2006600"/>
+            <a:ext cx="508000" cy="355600"/>
+          </a:xfrm>
+          <a:prstGeom prst="rect">
+            <a:avLst/>
+          </a:prstGeom>
+          <a:noFill/>
+          <a:ln w="0">
+            <a:noFill/>
+          </a:ln>
+        </p:spPr>
+        <p:txBody>
+          <a:bodyPr wrap="none" lIns="0" tIns="0" rIns="0" bIns="0" anchor="ctr"/>
+          <a:lstStyle/>
+          <a:p>
+            <a:pPr algn="ctr"/>
+            <a:r>
+              <a:rPr lang="en-US" sz="1400" b="1" dirty="0">
+                <a:solidFill>
+                  <a:srgbClr val="1B3A5C"/>
+                </a:solidFill>
+                <a:latin typeface="Calibri"/>
+              </a:rPr>
+              <a:t>Line</a:t>
+            </a:r>
+          </a:p>
+        </p:txBody>
+      </p:sp>
+      <p:sp>
+        <p:nvSpPr>
+          <p:cNvPr id="109" name="Label"/>
+          <p:cNvSpPr/>
+          <p:nvPr/>
+        </p:nvSpPr>
+        <p:spPr>
+          <a:xfrm>
+            <a:off x="3175000" y="6248400"/>
+            <a:ext cx="508000" cy="355600"/>
+          </a:xfrm>
+          <a:prstGeom prst="rect">
+            <a:avLst/>
+          </a:prstGeom>
+          <a:noFill/>
+          <a:ln w="0">
+            <a:noFill/>
+          </a:ln>
+        </p:spPr>
+        <p:txBody>
+          <a:bodyPr wrap="none" lIns="0" tIns="0" rIns="0" bIns="0" anchor="ctr"/>
+          <a:lstStyle/>
+          <a:p>
+            <a:pPr algn="ctr"/>
+            <a:r>
+              <a:rPr lang="en-US" sz="1400" b="1" dirty="0">
+                <a:solidFill>
+                  <a:srgbClr val="1B3A5C"/>
+                </a:solidFill>
+                <a:latin typeface="Calibri"/>
+              </a:rPr>
+              <a:t>Line</a:t>
+            </a:r>
+          </a:p>
+        </p:txBody>
+      </p:sp>
+      <p:sp>
+        <p:nvSpPr>
+          <p:cNvPr id="110" name="Robot"/>
+          <p:cNvSpPr/>
+          <p:nvPr/>
+        </p:nvSpPr>
+        <p:spPr>
+          <a:xfrm>
+            <a:off x="2908300" y="4445000"/>
+            <a:ext cx="1041400" cy="533400"/>
+          </a:xfrm>
+          <a:prstGeom prst="roundRect">
+            <a:avLst>
+              <a:gd name="adj" fmla="val 16667"/>
+            </a:avLst>
+          </a:prstGeom>
+          <a:solidFill>
+            <a:srgbClr val="E74C3C"/>
+          </a:solidFill>
+          <a:ln w="19050">
+            <a:solidFill>
+              <a:srgbClr val="C0392B"/>
+            </a:solidFill>
+          </a:ln>
+          <a:effectLst>
+            <a:outerShdw blurRad="50800" dist="25400" dir="5400000" algn="t" rotWithShape="0">
+              <a:srgbClr val="000000">
+                <a:alpha val="30000"/>
+              </a:srgbClr>
+            </a:outerShdw>
+          </a:effectLst>
+        </p:spPr>
+        <p:txBody>
+          <a:bodyPr wrap="none" lIns="0" tIns="0" rIns="0" bIns="0" anchor="ctr"/>
+          <a:lstStyle/>
+          <a:p>
+            <a:pPr algn="ctr"/>
+            <a:r>
+              <a:rPr lang="en-US" sz="1400" b="1" dirty="0">
+                <a:solidFill>
+                  <a:srgbClr val="FFFFFF"/>
+                </a:solidFill>
+                <a:latin typeface="Calibri"/>
+              </a:rPr>
+              <a:t>ROBOT</a:t>
+            </a:r>
+          </a:p>
+        </p:txBody>
+      </p:sp>
+      <p:sp>
+        <p:nvSpPr>
+          <p:cNvPr id="111" name="Sensor L"/>
+          <p:cNvSpPr/>
+          <p:nvPr/>
+        </p:nvSpPr>
+        <p:spPr>
+          <a:xfrm>
+            <a:off x="3162300" y="4216400"/>
+            <a:ext cx="203200" cy="203200"/>
+          </a:xfrm>
+          <a:prstGeom prst="ellipse">
+            <a:avLst/>
+          </a:prstGeom>
+          <a:solidFill>
+            <a:srgbClr val="F1C40F"/>
+          </a:solidFill>
+          <a:ln w="0">
+            <a:noFill/>
+          </a:ln>
+        </p:spPr>
+        <p:txBody>
+          <a:bodyPr/>
+          <a:lstStyle/>
+          <a:p>
+            <a:endParaRPr/>
+          </a:p>
+        </p:txBody>
+      </p:sp>
+      <p:sp>
+        <p:nvSpPr>
+          <p:cNvPr id="112" name="Sensor R"/>
+          <p:cNvSpPr/>
+          <p:nvPr/>
+        </p:nvSpPr>
+        <p:spPr>
+          <a:xfrm>
+            <a:off x="3492500" y="4216400"/>
+            <a:ext cx="203200" cy="203200"/>
+          </a:xfrm>
+          <a:prstGeom prst="ellipse">
+            <a:avLst/>
+          </a:prstGeom>
+          <a:solidFill>
+            <a:srgbClr val="F1C40F"/>
+          </a:solidFill>
+          <a:ln w="0">
+            <a:noFill/>
+          </a:ln>
+        </p:spPr>
+        <p:txBody>
+          <a:bodyPr/>
+          <a:lstStyle/>
+          <a:p>
+            <a:endParaRPr/>
+          </a:p>
+        </p:txBody>
+      </p:sp>
+      <p:sp>
+        <p:nvSpPr>
+          <p:cNvPr id="113" name="Callout"/>
+          <p:cNvSpPr/>
+          <p:nvPr/>
+        </p:nvSpPr>
+        <p:spPr>
+          <a:xfrm>
+            <a:off x="4064000" y="3048000"/>
+            <a:ext cx="2476500" cy="406400"/>
+          </a:xfrm>
+          <a:prstGeom prst="wedgeRoundRectCallout">
+            <a:avLst>
+              <a:gd name="adj1" fmla="val -65000"/>
+              <a:gd name="adj2" fmla="val 60000"/>
+              <a:gd name="adj3" fmla="val 16667"/>
+            </a:avLst>
+          </a:prstGeom>
+          <a:solidFill>
+            <a:srgbClr val="FFF3CD"/>
           </a:solidFill>
           <a:ln w="12700">
             <a:solidFill>
-              <a:srgbClr val="999999"/>
+              <a:srgbClr val="E8A317"/>
             </a:solidFill>
+          </a:ln>
+        </p:spPr>
+        <p:txBody>
+          <a:bodyPr wrap="square" lIns="36000" tIns="18000" rIns="36000" bIns="18000" anchor="ctr"/>
+          <a:lstStyle/>
+          <a:p>
+            <a:pPr algn="ctr"/>
+            <a:r>
+              <a:rPr lang="en-US" sz="1400" b="1" dirty="0">
+                <a:solidFill>
+                  <a:srgbClr val="E74C3C"/>
+                </a:solidFill>
+                <a:latin typeface="Calibri"/>
+              </a:rPr>
+              <a:t>Sensors right on the cross!</a:t>
+            </a:r>
+          </a:p>
+        </p:txBody>
+      </p:sp>
+    </p:spTree>
+    <p:extLst>
+      <p:ext uri="{BB962C8B-B14F-4D97-AF65-F5344CB8AC3E}">
+        <p14:creationId xmlns:p14="http://schemas.microsoft.com/office/powerpoint/2010/main" val="957151189"/>
+      </p:ext>
+    </p:extLst>
+  </p:cSld>
+  <p:clrMapOvr>
+    <a:masterClrMapping/>
+  </p:clrMapOvr>
+</p:sld>
+</file>
+
+<file path=ppt/slides/slide4.xml><?xml version="1.0" encoding="utf-8"?>
+<p:sld xmlns:a="http://schemas.openxmlformats.org/drawingml/2006/main" xmlns:r="http://schemas.openxmlformats.org/officeDocument/2006/relationships" xmlns:p="http://schemas.openxmlformats.org/presentationml/2006/main">
+  <p:cSld>
+    <p:spTree>
+      <p:nvGrpSpPr>
+        <p:cNvPr id="1" name=""/>
+        <p:cNvGrpSpPr/>
+        <p:nvPr/>
+      </p:nvGrpSpPr>
+      <p:grpSpPr>
+        <a:xfrm>
+          <a:off x="0" y="0"/>
+          <a:ext cx="0" cy="0"/>
+          <a:chOff x="0" y="0"/>
+          <a:chExt cx="0" cy="0"/>
+        </a:xfrm>
+      </p:grpSpPr>
+      <p:sp>
+        <p:nvSpPr>
+          <p:cNvPr id="2" name="Rectangle 1"/>
+          <p:cNvSpPr/>
+          <p:nvPr/>
+        </p:nvSpPr>
+        <p:spPr>
+          <a:xfrm>
+            <a:off x="0" y="0"/>
+            <a:ext cx="12191695" cy="1097280"/>
+          </a:xfrm>
+          <a:prstGeom prst="rect">
+            <a:avLst/>
+          </a:prstGeom>
+          <a:solidFill>
+            <a:srgbClr val="1B3A5C"/>
+          </a:solidFill>
+          <a:ln>
+            <a:noFill/>
           </a:ln>
         </p:spPr>
         <p:style>
@@ -4129,19 +4731,20 @@
           <a:lstStyle/>
           <a:p>
             <a:pPr algn="ctr"/>
-          </a:p>
-        </p:txBody>
-      </p:sp>
-      <p:sp>
-        <p:nvSpPr>
-          <p:cNvPr id="6" name="TextBox 5"/>
+            <a:endParaRPr/>
+          </a:p>
+        </p:txBody>
+      </p:sp>
+      <p:sp>
+        <p:nvSpPr>
+          <p:cNvPr id="3" name="TextBox 2"/>
           <p:cNvSpPr txBox="1"/>
           <p:nvPr/>
         </p:nvSpPr>
         <p:spPr>
           <a:xfrm>
-            <a:off x="731520" y="1737360"/>
-            <a:ext cx="5303520" cy="1234440"/>
+            <a:off x="548640" y="137160"/>
+            <a:ext cx="10972800" cy="822960"/>
           </a:xfrm>
           <a:prstGeom prst="rect">
             <a:avLst/>
@@ -4155,96 +4758,29 @@
           <a:lstStyle/>
           <a:p>
             <a:pPr>
-              <a:spcAft>
-                <a:spcPts val="100"/>
-              </a:spcAft>
-              <a:defRPr sz="1300">
-                <a:solidFill>
-                  <a:srgbClr val="333333"/>
-                </a:solidFill>
-                <a:latin typeface="Courier New"/>
-              </a:defRPr>
-            </a:pPr>
-            <a:r>
-              <a:t>Line ──────+────── Line</a:t>
-            </a:r>
-          </a:p>
-          <a:p>
-            <a:pPr>
-              <a:spcAft>
-                <a:spcPts val="100"/>
-              </a:spcAft>
-              <a:defRPr sz="1300">
-                <a:solidFill>
-                  <a:srgbClr val="333333"/>
-                </a:solidFill>
-                <a:latin typeface="Courier New"/>
-              </a:defRPr>
-            </a:pPr>
-            <a:r>
-              <a:t>             |</a:t>
-            </a:r>
-          </a:p>
-          <a:p>
-            <a:pPr>
-              <a:spcAft>
-                <a:spcPts val="100"/>
-              </a:spcAft>
-              <a:defRPr sz="1300">
-                <a:solidFill>
-                  <a:srgbClr val="333333"/>
-                </a:solidFill>
-                <a:latin typeface="Courier New"/>
-              </a:defRPr>
-            </a:pPr>
-            <a:r>
-              <a:t>         [ROBOT]  ← Sensors right on the cross!</a:t>
-            </a:r>
-          </a:p>
-          <a:p>
-            <a:pPr>
-              <a:spcAft>
-                <a:spcPts val="100"/>
-              </a:spcAft>
-              <a:defRPr sz="1300">
-                <a:solidFill>
-                  <a:srgbClr val="333333"/>
-                </a:solidFill>
-                <a:latin typeface="Courier New"/>
-              </a:defRPr>
-            </a:pPr>
-            <a:r>
-              <a:t>             |</a:t>
-            </a:r>
-          </a:p>
-          <a:p>
-            <a:pPr>
-              <a:spcAft>
-                <a:spcPts val="100"/>
-              </a:spcAft>
-              <a:defRPr sz="1300">
-                <a:solidFill>
-                  <a:srgbClr val="333333"/>
-                </a:solidFill>
-                <a:latin typeface="Courier New"/>
-              </a:defRPr>
-            </a:pPr>
-            <a:r>
-              <a:t>             Line</a:t>
-            </a:r>
-          </a:p>
-        </p:txBody>
-      </p:sp>
-      <p:sp>
-        <p:nvSpPr>
-          <p:cNvPr id="7" name="TextBox 6"/>
+              <a:defRPr sz="3200" b="1">
+                <a:solidFill>
+                  <a:srgbClr val="FFFFFF"/>
+                </a:solidFill>
+                <a:latin typeface="Calibri"/>
+              </a:defRPr>
+            </a:pPr>
+            <a:r>
+              <a:t>Clearing the Intersection</a:t>
+            </a:r>
+          </a:p>
+        </p:txBody>
+      </p:sp>
+      <p:sp>
+        <p:nvSpPr>
+          <p:cNvPr id="4" name="TextBox 3"/>
           <p:cNvSpPr txBox="1"/>
           <p:nvPr/>
         </p:nvSpPr>
         <p:spPr>
           <a:xfrm>
-            <a:off x="6583680" y="1645920"/>
-            <a:ext cx="5029200" cy="1417320"/>
+            <a:off x="548640" y="1371600"/>
+            <a:ext cx="10972800" cy="365760"/>
           </a:xfrm>
           <a:prstGeom prst="rect">
             <a:avLst/>
@@ -4266,112 +4802,32 @@
               </a:defRPr>
             </a:pPr>
             <a:r>
-              <a:t>If we call track_until_cross() again:</a:t>
-            </a:r>
-          </a:p>
-          <a:p>
-            <a:pPr>
-              <a:spcAft>
-                <a:spcPts val="400"/>
-              </a:spcAft>
-              <a:defRPr sz="1600" b="0">
-                <a:solidFill>
-                  <a:srgbClr val="000000"/>
-                </a:solidFill>
-                <a:latin typeface="Calibri"/>
-              </a:defRPr>
-            </a:pPr>
-            <a:r>
-              <a:t>Both sensors are already above threshold</a:t>
-            </a:r>
-          </a:p>
-          <a:p>
-            <a:pPr>
-              <a:spcAft>
-                <a:spcPts val="400"/>
-              </a:spcAft>
-              <a:defRPr sz="1600" b="0">
-                <a:solidFill>
-                  <a:srgbClr val="000000"/>
-                </a:solidFill>
-                <a:latin typeface="Calibri"/>
-              </a:defRPr>
-            </a:pPr>
-            <a:r>
-              <a:t>is_at_cross() returns True immediately</a:t>
-            </a:r>
-          </a:p>
-          <a:p>
-            <a:pPr>
-              <a:spcAft>
-                <a:spcPts val="400"/>
-              </a:spcAft>
-              <a:defRPr sz="1600" b="0">
-                <a:solidFill>
-                  <a:srgbClr val="000000"/>
-                </a:solidFill>
-                <a:latin typeface="Calibri"/>
-              </a:defRPr>
-            </a:pPr>
-            <a:r>
-              <a:t>The robot "detects" the intersection it's already on!</a:t>
-            </a:r>
-          </a:p>
-          <a:p>
-            <a:pPr>
-              <a:spcAft>
-                <a:spcPts val="400"/>
-              </a:spcAft>
-              <a:defRPr sz="1800" b="1">
-                <a:solidFill>
-                  <a:srgbClr val="1B3A5C"/>
-                </a:solidFill>
-                <a:latin typeface="Calibri"/>
-              </a:defRPr>
-            </a:pPr>
-            <a:r>
-              <a:t>Solution: Drive forward briefly to move PAST the cross.</a:t>
-            </a:r>
-          </a:p>
-        </p:txBody>
-      </p:sp>
-    </p:spTree>
-  </p:cSld>
-  <p:clrMapOvr>
-    <a:masterClrMapping/>
-  </p:clrMapOvr>
-</p:sld>
-</file>
-
-<file path=ppt/slides/slide4.xml><?xml version="1.0" encoding="utf-8"?>
-<p:sld xmlns:a="http://schemas.openxmlformats.org/drawingml/2006/main" xmlns:p="http://schemas.openxmlformats.org/presentationml/2006/main" xmlns:r="http://schemas.openxmlformats.org/officeDocument/2006/relationships">
-  <p:cSld>
-    <p:spTree>
-      <p:nvGrpSpPr>
-        <p:cNvPr id="1" name=""/>
-        <p:cNvGrpSpPr/>
-        <p:nvPr/>
-      </p:nvGrpSpPr>
-      <p:grpSpPr/>
-      <p:sp>
-        <p:nvSpPr>
-          <p:cNvPr id="2" name="Rectangle 1"/>
+              <a:t>The fix: Drive forward a short distance after detecting:</a:t>
+            </a:r>
+          </a:p>
+        </p:txBody>
+      </p:sp>
+      <p:sp>
+        <p:nvSpPr>
+          <p:cNvPr id="5" name="Rounded Rectangle 4"/>
           <p:cNvSpPr/>
           <p:nvPr/>
         </p:nvSpPr>
         <p:spPr>
           <a:xfrm>
-            <a:off x="0" y="0"/>
-            <a:ext cx="12191695" cy="1097280"/>
-          </a:xfrm>
-          <a:prstGeom prst="rect">
+            <a:off x="548640" y="1841500"/>
+            <a:ext cx="5669280" cy="2331720"/>
+          </a:xfrm>
+          <a:prstGeom prst="roundRect">
             <a:avLst/>
           </a:prstGeom>
           <a:solidFill>
-            <a:srgbClr val="1B3A5C"/>
+            <a:srgbClr val="F0F0F0"/>
           </a:solidFill>
-          <a:ln>
-            <a:noFill/>
+          <a:ln w="12700">
+            <a:solidFill>
+              <a:srgbClr val="999999"/>
+            </a:solidFill>
           </a:ln>
         </p:spPr>
         <p:style>
@@ -4393,19 +4849,20 @@
           <a:lstStyle/>
           <a:p>
             <a:pPr algn="ctr"/>
-          </a:p>
-        </p:txBody>
-      </p:sp>
-      <p:sp>
-        <p:nvSpPr>
-          <p:cNvPr id="3" name="TextBox 2"/>
+            <a:endParaRPr/>
+          </a:p>
+        </p:txBody>
+      </p:sp>
+      <p:sp>
+        <p:nvSpPr>
+          <p:cNvPr id="6" name="TextBox 5"/>
           <p:cNvSpPr txBox="1"/>
           <p:nvPr/>
         </p:nvSpPr>
         <p:spPr>
           <a:xfrm>
-            <a:off x="548640" y="137160"/>
-            <a:ext cx="10972800" cy="822960"/>
+            <a:off x="731520" y="1932940"/>
+            <a:ext cx="5303520" cy="2148840"/>
           </a:xfrm>
           <a:prstGeom prst="rect">
             <a:avLst/>
@@ -4419,29 +4876,140 @@
           <a:lstStyle/>
           <a:p>
             <a:pPr>
-              <a:defRPr sz="3200" b="1">
-                <a:solidFill>
-                  <a:srgbClr val="FFFFFF"/>
-                </a:solidFill>
-                <a:latin typeface="Calibri"/>
-              </a:defRPr>
-            </a:pPr>
-            <a:r>
-              <a:t>Clearing the Intersection</a:t>
-            </a:r>
-          </a:p>
-        </p:txBody>
-      </p:sp>
-      <p:sp>
-        <p:nvSpPr>
-          <p:cNvPr id="4" name="TextBox 3"/>
+              <a:spcAft>
+                <a:spcPts val="100"/>
+              </a:spcAft>
+              <a:defRPr sz="1300">
+                <a:solidFill>
+                  <a:srgbClr val="333333"/>
+                </a:solidFill>
+                <a:latin typeface="Courier New"/>
+              </a:defRPr>
+            </a:pPr>
+            <a:r>
+              <a:t># Detect the intersection</a:t>
+            </a:r>
+          </a:p>
+          <a:p>
+            <a:pPr>
+              <a:spcAft>
+                <a:spcPts val="100"/>
+              </a:spcAft>
+              <a:defRPr sz="1300">
+                <a:solidFill>
+                  <a:srgbClr val="333333"/>
+                </a:solidFill>
+                <a:latin typeface="Courier New"/>
+              </a:defRPr>
+            </a:pPr>
+            <a:r>
+              <a:t>tracker.track_until_cross()</a:t>
+            </a:r>
+          </a:p>
+          <a:p>
+            <a:pPr>
+              <a:spcAft>
+                <a:spcPts val="100"/>
+              </a:spcAft>
+              <a:defRPr sz="1300">
+                <a:solidFill>
+                  <a:srgbClr val="333333"/>
+                </a:solidFill>
+                <a:latin typeface="Courier New"/>
+              </a:defRPr>
+            </a:pPr>
+            <a:endParaRPr/>
+          </a:p>
+          <a:p>
+            <a:pPr>
+              <a:spcAft>
+                <a:spcPts val="100"/>
+              </a:spcAft>
+              <a:defRPr sz="1300">
+                <a:solidFill>
+                  <a:srgbClr val="333333"/>
+                </a:solidFill>
+                <a:latin typeface="Courier New"/>
+              </a:defRPr>
+            </a:pPr>
+            <a:r>
+              <a:t># Clear the intersection (drive past it)</a:t>
+            </a:r>
+          </a:p>
+          <a:p>
+            <a:pPr>
+              <a:spcAft>
+                <a:spcPts val="100"/>
+              </a:spcAft>
+              <a:defRPr sz="1300">
+                <a:solidFill>
+                  <a:srgbClr val="333333"/>
+                </a:solidFill>
+                <a:latin typeface="Courier New"/>
+              </a:defRPr>
+            </a:pPr>
+            <a:r>
+              <a:t>tracker.drivetrain.straight(3)</a:t>
+            </a:r>
+          </a:p>
+          <a:p>
+            <a:pPr>
+              <a:spcAft>
+                <a:spcPts val="100"/>
+              </a:spcAft>
+              <a:defRPr sz="1300">
+                <a:solidFill>
+                  <a:srgbClr val="333333"/>
+                </a:solidFill>
+                <a:latin typeface="Courier New"/>
+              </a:defRPr>
+            </a:pPr>
+            <a:endParaRPr/>
+          </a:p>
+          <a:p>
+            <a:pPr>
+              <a:spcAft>
+                <a:spcPts val="100"/>
+              </a:spcAft>
+              <a:defRPr sz="1300">
+                <a:solidFill>
+                  <a:srgbClr val="333333"/>
+                </a:solidFill>
+                <a:latin typeface="Courier New"/>
+              </a:defRPr>
+            </a:pPr>
+            <a:r>
+              <a:t># Now we can detect the NEXT intersection</a:t>
+            </a:r>
+          </a:p>
+          <a:p>
+            <a:pPr>
+              <a:spcAft>
+                <a:spcPts val="100"/>
+              </a:spcAft>
+              <a:defRPr sz="1300">
+                <a:solidFill>
+                  <a:srgbClr val="333333"/>
+                </a:solidFill>
+                <a:latin typeface="Courier New"/>
+              </a:defRPr>
+            </a:pPr>
+            <a:r>
+              <a:t>tracker.track_until_cross()</a:t>
+            </a:r>
+          </a:p>
+        </p:txBody>
+      </p:sp>
+      <p:sp>
+        <p:nvSpPr>
+          <p:cNvPr id="7" name="TextBox 6"/>
           <p:cNvSpPr txBox="1"/>
           <p:nvPr/>
         </p:nvSpPr>
         <p:spPr>
           <a:xfrm>
-            <a:off x="548640" y="1371600"/>
-            <a:ext cx="10972800" cy="365760"/>
+            <a:off x="6583680" y="1841500"/>
+            <a:ext cx="5029200" cy="2331720"/>
           </a:xfrm>
           <a:prstGeom prst="rect">
             <a:avLst/>
@@ -4463,32 +5031,124 @@
               </a:defRPr>
             </a:pPr>
             <a:r>
-              <a:t>The fix: Drive forward a short distance after detecting:</a:t>
-            </a:r>
-          </a:p>
-        </p:txBody>
-      </p:sp>
-      <p:sp>
-        <p:nvSpPr>
-          <p:cNvPr id="5" name="Rounded Rectangle 4"/>
+              <a:t>The clearing drive:</a:t>
+            </a:r>
+          </a:p>
+          <a:p>
+            <a:pPr>
+              <a:spcAft>
+                <a:spcPts val="400"/>
+              </a:spcAft>
+              <a:defRPr sz="1600" b="0">
+                <a:solidFill>
+                  <a:srgbClr val="000000"/>
+                </a:solidFill>
+                <a:latin typeface="Calibri"/>
+              </a:defRPr>
+            </a:pPr>
+            <a:r>
+              <a:t>Drives forward a short distance (3 cm)</a:t>
+            </a:r>
+          </a:p>
+          <a:p>
+            <a:pPr>
+              <a:spcAft>
+                <a:spcPts val="400"/>
+              </a:spcAft>
+              <a:defRPr sz="1600" b="0">
+                <a:solidFill>
+                  <a:srgbClr val="000000"/>
+                </a:solidFill>
+                <a:latin typeface="Calibri"/>
+              </a:defRPr>
+            </a:pPr>
+            <a:r>
+              <a:t>Just enough to move past the cross</a:t>
+            </a:r>
+          </a:p>
+          <a:p>
+            <a:pPr>
+              <a:spcAft>
+                <a:spcPts val="400"/>
+              </a:spcAft>
+              <a:defRPr sz="1600" b="0">
+                <a:solidFill>
+                  <a:srgbClr val="000000"/>
+                </a:solidFill>
+                <a:latin typeface="Calibri"/>
+              </a:defRPr>
+            </a:pPr>
+            <a:r>
+              <a:t>Consistent regardless of battery voltage</a:t>
+            </a:r>
+          </a:p>
+          <a:p>
+            <a:pPr>
+              <a:spcAft>
+                <a:spcPts val="400"/>
+              </a:spcAft>
+              <a:defRPr sz="1600" b="0">
+                <a:solidFill>
+                  <a:srgbClr val="000000"/>
+                </a:solidFill>
+                <a:latin typeface="Calibri"/>
+              </a:defRPr>
+            </a:pPr>
+            <a:r>
+              <a:t>Adjust distance for your grid spacing</a:t>
+            </a:r>
+          </a:p>
+        </p:txBody>
+      </p:sp>
+    </p:spTree>
+    <p:extLst>
+      <p:ext uri="{BB962C8B-B14F-4D97-AF65-F5344CB8AC3E}">
+        <p14:creationId xmlns:p14="http://schemas.microsoft.com/office/powerpoint/2010/main" val="4143219988"/>
+      </p:ext>
+    </p:extLst>
+  </p:cSld>
+  <p:clrMapOvr>
+    <a:masterClrMapping/>
+  </p:clrMapOvr>
+</p:sld>
+</file>
+
+<file path=ppt/slides/slide5.xml><?xml version="1.0" encoding="utf-8"?>
+<p:sld xmlns:a="http://schemas.openxmlformats.org/drawingml/2006/main" xmlns:r="http://schemas.openxmlformats.org/officeDocument/2006/relationships" xmlns:p="http://schemas.openxmlformats.org/presentationml/2006/main">
+  <p:cSld>
+    <p:spTree>
+      <p:nvGrpSpPr>
+        <p:cNvPr id="1" name=""/>
+        <p:cNvGrpSpPr/>
+        <p:nvPr/>
+      </p:nvGrpSpPr>
+      <p:grpSpPr>
+        <a:xfrm>
+          <a:off x="0" y="0"/>
+          <a:ext cx="0" cy="0"/>
+          <a:chOff x="0" y="0"/>
+          <a:chExt cx="0" cy="0"/>
+        </a:xfrm>
+      </p:grpSpPr>
+      <p:sp>
+        <p:nvSpPr>
+          <p:cNvPr id="2" name="Rectangle 1"/>
           <p:cNvSpPr/>
           <p:nvPr/>
         </p:nvSpPr>
         <p:spPr>
           <a:xfrm>
-            <a:off x="548640" y="1645920"/>
-            <a:ext cx="5669280" cy="2331720"/>
-          </a:xfrm>
-          <a:prstGeom prst="roundRect">
+            <a:off x="0" y="0"/>
+            <a:ext cx="12191695" cy="1097280"/>
+          </a:xfrm>
+          <a:prstGeom prst="rect">
             <a:avLst/>
           </a:prstGeom>
           <a:solidFill>
-            <a:srgbClr val="F0F0F0"/>
+            <a:srgbClr val="1B3A5C"/>
           </a:solidFill>
-          <a:ln w="12700">
-            <a:solidFill>
-              <a:srgbClr val="999999"/>
-            </a:solidFill>
+          <a:ln>
+            <a:noFill/>
           </a:ln>
         </p:spPr>
         <p:style>
@@ -4510,19 +5170,20 @@
           <a:lstStyle/>
           <a:p>
             <a:pPr algn="ctr"/>
-          </a:p>
-        </p:txBody>
-      </p:sp>
-      <p:sp>
-        <p:nvSpPr>
-          <p:cNvPr id="6" name="TextBox 5"/>
+            <a:endParaRPr/>
+          </a:p>
+        </p:txBody>
+      </p:sp>
+      <p:sp>
+        <p:nvSpPr>
+          <p:cNvPr id="3" name="TextBox 2"/>
           <p:cNvSpPr txBox="1"/>
           <p:nvPr/>
         </p:nvSpPr>
         <p:spPr>
           <a:xfrm>
-            <a:off x="731520" y="1737360"/>
-            <a:ext cx="5303520" cy="2148840"/>
+            <a:off x="548640" y="137160"/>
+            <a:ext cx="10972800" cy="822960"/>
           </a:xfrm>
           <a:prstGeom prst="rect">
             <a:avLst/>
@@ -4536,154 +5197,29 @@
           <a:lstStyle/>
           <a:p>
             <a:pPr>
-              <a:spcAft>
-                <a:spcPts val="100"/>
-              </a:spcAft>
-              <a:defRPr sz="1300">
-                <a:solidFill>
-                  <a:srgbClr val="333333"/>
-                </a:solidFill>
-                <a:latin typeface="Courier New"/>
-              </a:defRPr>
-            </a:pPr>
-            <a:r>
-              <a:t># Detect the intersection</a:t>
-            </a:r>
-          </a:p>
-          <a:p>
-            <a:pPr>
-              <a:spcAft>
-                <a:spcPts val="100"/>
-              </a:spcAft>
-              <a:defRPr sz="1300">
-                <a:solidFill>
-                  <a:srgbClr val="333333"/>
-                </a:solidFill>
-                <a:latin typeface="Courier New"/>
-              </a:defRPr>
-            </a:pPr>
-            <a:r>
-              <a:t>tracker.track_until_cross()</a:t>
-            </a:r>
-          </a:p>
-          <a:p>
-            <a:pPr>
-              <a:spcAft>
-                <a:spcPts val="100"/>
-              </a:spcAft>
-              <a:defRPr sz="1300">
-                <a:solidFill>
-                  <a:srgbClr val="333333"/>
-                </a:solidFill>
-                <a:latin typeface="Courier New"/>
-              </a:defRPr>
-            </a:pPr>
-          </a:p>
-          <a:p>
-            <a:pPr>
-              <a:spcAft>
-                <a:spcPts val="100"/>
-              </a:spcAft>
-              <a:defRPr sz="1300">
-                <a:solidFill>
-                  <a:srgbClr val="333333"/>
-                </a:solidFill>
-                <a:latin typeface="Courier New"/>
-              </a:defRPr>
-            </a:pPr>
-            <a:r>
-              <a:t># Clear the intersection (drive past it)</a:t>
-            </a:r>
-          </a:p>
-          <a:p>
-            <a:pPr>
-              <a:spcAft>
-                <a:spcPts val="100"/>
-              </a:spcAft>
-              <a:defRPr sz="1300">
-                <a:solidFill>
-                  <a:srgbClr val="333333"/>
-                </a:solidFill>
-                <a:latin typeface="Courier New"/>
-              </a:defRPr>
-            </a:pPr>
-            <a:r>
-              <a:t>tracker.drivetrain.set_effort(0.3, 0.3)</a:t>
-            </a:r>
-          </a:p>
-          <a:p>
-            <a:pPr>
-              <a:spcAft>
-                <a:spcPts val="100"/>
-              </a:spcAft>
-              <a:defRPr sz="1300">
-                <a:solidFill>
-                  <a:srgbClr val="333333"/>
-                </a:solidFill>
-                <a:latin typeface="Courier New"/>
-              </a:defRPr>
-            </a:pPr>
-            <a:r>
-              <a:t>time.sleep(0.3)</a:t>
-            </a:r>
-          </a:p>
-          <a:p>
-            <a:pPr>
-              <a:spcAft>
-                <a:spcPts val="100"/>
-              </a:spcAft>
-              <a:defRPr sz="1300">
-                <a:solidFill>
-                  <a:srgbClr val="333333"/>
-                </a:solidFill>
-                <a:latin typeface="Courier New"/>
-              </a:defRPr>
-            </a:pPr>
-          </a:p>
-          <a:p>
-            <a:pPr>
-              <a:spcAft>
-                <a:spcPts val="100"/>
-              </a:spcAft>
-              <a:defRPr sz="1300">
-                <a:solidFill>
-                  <a:srgbClr val="333333"/>
-                </a:solidFill>
-                <a:latin typeface="Courier New"/>
-              </a:defRPr>
-            </a:pPr>
-            <a:r>
-              <a:t># Now we can detect the NEXT intersection</a:t>
-            </a:r>
-          </a:p>
-          <a:p>
-            <a:pPr>
-              <a:spcAft>
-                <a:spcPts val="100"/>
-              </a:spcAft>
-              <a:defRPr sz="1300">
-                <a:solidFill>
-                  <a:srgbClr val="333333"/>
-                </a:solidFill>
-                <a:latin typeface="Courier New"/>
-              </a:defRPr>
-            </a:pPr>
-            <a:r>
-              <a:t>tracker.track_until_cross()</a:t>
-            </a:r>
-          </a:p>
-        </p:txBody>
-      </p:sp>
-      <p:sp>
-        <p:nvSpPr>
-          <p:cNvPr id="7" name="TextBox 6"/>
+              <a:defRPr sz="3200" b="1">
+                <a:solidFill>
+                  <a:srgbClr val="FFFFFF"/>
+                </a:solidFill>
+                <a:latin typeface="Calibri"/>
+              </a:defRPr>
+            </a:pPr>
+            <a:r>
+              <a:t>Driving Two Intersections</a:t>
+            </a:r>
+          </a:p>
+        </p:txBody>
+      </p:sp>
+      <p:sp>
+        <p:nvSpPr>
+          <p:cNvPr id="4" name="TextBox 3"/>
           <p:cNvSpPr txBox="1"/>
           <p:nvPr/>
         </p:nvSpPr>
         <p:spPr>
           <a:xfrm>
-            <a:off x="6583680" y="1645920"/>
-            <a:ext cx="5029200" cy="2331720"/>
+            <a:off x="548640" y="1371600"/>
+            <a:ext cx="10972800" cy="365760"/>
           </a:xfrm>
           <a:prstGeom prst="rect">
             <a:avLst/>
@@ -4697,7 +5233,10 @@
           <a:lstStyle/>
           <a:p>
             <a:pPr>
-              <a:defRPr sz="1800" b="1">
+              <a:spcAft>
+                <a:spcPts val="400"/>
+              </a:spcAft>
+              <a:defRPr sz="2000" b="1">
                 <a:solidFill>
                   <a:srgbClr val="1B3A5C"/>
                 </a:solidFill>
@@ -4705,7 +5244,7 @@
               </a:defRPr>
             </a:pPr>
             <a:r>
-              <a:t>The clearing drive:</a:t>
+              <a:t>Complete program:</a:t>
             </a:r>
           </a:p>
           <a:p>
@@ -4713,88 +5252,38 @@
               <a:spcAft>
                 <a:spcPts val="400"/>
               </a:spcAft>
-              <a:defRPr sz="1600" b="0">
+              <a:defRPr sz="400" b="0">
                 <a:solidFill>
                   <a:srgbClr val="000000"/>
                 </a:solidFill>
                 <a:latin typeface="Calibri"/>
               </a:defRPr>
             </a:pPr>
-            <a:r>
-              <a:t>Low speed (0.3 effort) — don't go too fast</a:t>
-            </a:r>
-          </a:p>
-          <a:p>
-            <a:pPr>
-              <a:spcAft>
-                <a:spcPts val="400"/>
-              </a:spcAft>
-              <a:defRPr sz="1600" b="0">
-                <a:solidFill>
-                  <a:srgbClr val="000000"/>
-                </a:solidFill>
-                <a:latin typeface="Calibri"/>
-              </a:defRPr>
-            </a:pPr>
-            <a:r>
-              <a:t>Short time (0.3 seconds) — just enough to move past</a:t>
-            </a:r>
-          </a:p>
-          <a:p>
-            <a:pPr>
-              <a:spcAft>
-                <a:spcPts val="400"/>
-              </a:spcAft>
-              <a:defRPr sz="1600" b="0">
-                <a:solidFill>
-                  <a:srgbClr val="000000"/>
-                </a:solidFill>
-                <a:latin typeface="Calibri"/>
-              </a:defRPr>
-            </a:pPr>
-            <a:r>
-              <a:t>Adjust these values for your robot and grid spacing</a:t>
-            </a:r>
-          </a:p>
-        </p:txBody>
-      </p:sp>
-    </p:spTree>
-  </p:cSld>
-  <p:clrMapOvr>
-    <a:masterClrMapping/>
-  </p:clrMapOvr>
-</p:sld>
-</file>
-
-<file path=ppt/slides/slide5.xml><?xml version="1.0" encoding="utf-8"?>
-<p:sld xmlns:a="http://schemas.openxmlformats.org/drawingml/2006/main" xmlns:p="http://schemas.openxmlformats.org/presentationml/2006/main" xmlns:r="http://schemas.openxmlformats.org/officeDocument/2006/relationships">
-  <p:cSld>
-    <p:spTree>
-      <p:nvGrpSpPr>
-        <p:cNvPr id="1" name=""/>
-        <p:cNvGrpSpPr/>
-        <p:nvPr/>
-      </p:nvGrpSpPr>
-      <p:grpSpPr/>
-      <p:sp>
-        <p:nvSpPr>
-          <p:cNvPr id="2" name="Rectangle 1"/>
+            <a:endParaRPr/>
+          </a:p>
+        </p:txBody>
+      </p:sp>
+      <p:sp>
+        <p:nvSpPr>
+          <p:cNvPr id="5" name="Rounded Rectangle 4"/>
           <p:cNvSpPr/>
           <p:nvPr/>
         </p:nvSpPr>
         <p:spPr>
           <a:xfrm>
-            <a:off x="0" y="0"/>
-            <a:ext cx="12191695" cy="1097280"/>
-          </a:xfrm>
-          <a:prstGeom prst="rect">
+            <a:off x="548640" y="2011680"/>
+            <a:ext cx="10972800" cy="3539114"/>
+          </a:xfrm>
+          <a:prstGeom prst="roundRect">
             <a:avLst/>
           </a:prstGeom>
           <a:solidFill>
-            <a:srgbClr val="1B3A5C"/>
+            <a:srgbClr val="F0F0F0"/>
           </a:solidFill>
-          <a:ln>
-            <a:noFill/>
+          <a:ln w="12700">
+            <a:solidFill>
+              <a:srgbClr val="999999"/>
+            </a:solidFill>
           </a:ln>
         </p:spPr>
         <p:style>
@@ -4816,19 +5305,20 @@
           <a:lstStyle/>
           <a:p>
             <a:pPr algn="ctr"/>
-          </a:p>
-        </p:txBody>
-      </p:sp>
-      <p:sp>
-        <p:nvSpPr>
-          <p:cNvPr id="3" name="TextBox 2"/>
+            <a:endParaRPr/>
+          </a:p>
+        </p:txBody>
+      </p:sp>
+      <p:sp>
+        <p:nvSpPr>
+          <p:cNvPr id="6" name="TextBox 5"/>
           <p:cNvSpPr txBox="1"/>
           <p:nvPr/>
         </p:nvSpPr>
         <p:spPr>
           <a:xfrm>
-            <a:off x="548640" y="137160"/>
-            <a:ext cx="10972800" cy="822960"/>
+            <a:off x="731520" y="2103120"/>
+            <a:ext cx="10607040" cy="3017520"/>
           </a:xfrm>
           <a:prstGeom prst="rect">
             <a:avLst/>
@@ -4842,28 +5332,244 @@
           <a:lstStyle/>
           <a:p>
             <a:pPr>
-              <a:defRPr sz="3200" b="1">
-                <a:solidFill>
-                  <a:srgbClr val="FFFFFF"/>
-                </a:solidFill>
-                <a:latin typeface="Calibri"/>
-              </a:defRPr>
-            </a:pPr>
-            <a:r>
-              <a:t>Driving Two Intersections</a:t>
-            </a:r>
-          </a:p>
-        </p:txBody>
-      </p:sp>
-      <p:sp>
-        <p:nvSpPr>
-          <p:cNvPr id="4" name="TextBox 3"/>
+              <a:spcAft>
+                <a:spcPts val="100"/>
+              </a:spcAft>
+              <a:defRPr sz="1300">
+                <a:solidFill>
+                  <a:srgbClr val="333333"/>
+                </a:solidFill>
+                <a:latin typeface="Courier New"/>
+              </a:defRPr>
+            </a:pPr>
+            <a:r>
+              <a:rPr lang="en-US" dirty="0"/>
+              <a:t>board.wait_for_button()</a:t>
+            </a:r>
+          </a:p>
+          <a:p>
+            <a:pPr>
+              <a:spcAft>
+                <a:spcPts val="100"/>
+              </a:spcAft>
+              <a:defRPr sz="1300">
+                <a:solidFill>
+                  <a:srgbClr val="333333"/>
+                </a:solidFill>
+                <a:latin typeface="Courier New"/>
+              </a:defRPr>
+            </a:pPr>
+            <a:endParaRPr lang="en-US" dirty="0"/>
+          </a:p>
+          <a:p>
+            <a:pPr>
+              <a:spcAft>
+                <a:spcPts val="100"/>
+              </a:spcAft>
+              <a:defRPr sz="1300">
+                <a:solidFill>
+                  <a:srgbClr val="333333"/>
+                </a:solidFill>
+                <a:latin typeface="Courier New"/>
+              </a:defRPr>
+            </a:pPr>
+            <a:r>
+              <a:rPr lang="en-US" dirty="0"/>
+              <a:t># Intersection 1</a:t>
+            </a:r>
+          </a:p>
+          <a:p>
+            <a:pPr>
+              <a:spcAft>
+                <a:spcPts val="100"/>
+              </a:spcAft>
+              <a:defRPr sz="1300">
+                <a:solidFill>
+                  <a:srgbClr val="333333"/>
+                </a:solidFill>
+                <a:latin typeface="Courier New"/>
+              </a:defRPr>
+            </a:pPr>
+            <a:r>
+              <a:rPr lang="en-US" dirty="0"/>
+              <a:t>print("Driving to intersection 1...")</a:t>
+            </a:r>
+          </a:p>
+          <a:p>
+            <a:pPr>
+              <a:spcAft>
+                <a:spcPts val="100"/>
+              </a:spcAft>
+              <a:defRPr sz="1300">
+                <a:solidFill>
+                  <a:srgbClr val="333333"/>
+                </a:solidFill>
+                <a:latin typeface="Courier New"/>
+              </a:defRPr>
+            </a:pPr>
+            <a:r>
+              <a:rPr lang="en-US" dirty="0"/>
+              <a:t>tracker.track_until_cross()</a:t>
+            </a:r>
+          </a:p>
+          <a:p>
+            <a:pPr>
+              <a:spcAft>
+                <a:spcPts val="100"/>
+              </a:spcAft>
+              <a:defRPr sz="1300">
+                <a:solidFill>
+                  <a:srgbClr val="333333"/>
+                </a:solidFill>
+                <a:latin typeface="Courier New"/>
+              </a:defRPr>
+            </a:pPr>
+            <a:r>
+              <a:rPr lang="en-US" dirty="0"/>
+              <a:t>print("Reached intersection 1!")</a:t>
+            </a:r>
+          </a:p>
+          <a:p>
+            <a:pPr>
+              <a:spcAft>
+                <a:spcPts val="100"/>
+              </a:spcAft>
+              <a:defRPr sz="1300">
+                <a:solidFill>
+                  <a:srgbClr val="333333"/>
+                </a:solidFill>
+                <a:latin typeface="Courier New"/>
+              </a:defRPr>
+            </a:pPr>
+            <a:endParaRPr lang="en-US" dirty="0"/>
+          </a:p>
+          <a:p>
+            <a:pPr>
+              <a:spcAft>
+                <a:spcPts val="100"/>
+              </a:spcAft>
+              <a:defRPr sz="1300">
+                <a:solidFill>
+                  <a:srgbClr val="333333"/>
+                </a:solidFill>
+                <a:latin typeface="Courier New"/>
+              </a:defRPr>
+            </a:pPr>
+            <a:r>
+              <a:rPr lang="en-US" dirty="0"/>
+              <a:t># Clear</a:t>
+            </a:r>
+          </a:p>
+          <a:p>
+            <a:pPr>
+              <a:spcAft>
+                <a:spcPts val="100"/>
+              </a:spcAft>
+              <a:defRPr sz="1300">
+                <a:solidFill>
+                  <a:srgbClr val="333333"/>
+                </a:solidFill>
+                <a:latin typeface="Courier New"/>
+              </a:defRPr>
+            </a:pPr>
+            <a:r>
+              <a:rPr lang="en-US" dirty="0"/>
+              <a:t>tracker.drivetrain.straight(3)</a:t>
+            </a:r>
+          </a:p>
+          <a:p>
+            <a:pPr>
+              <a:spcAft>
+                <a:spcPts val="100"/>
+              </a:spcAft>
+              <a:defRPr sz="1300">
+                <a:solidFill>
+                  <a:srgbClr val="333333"/>
+                </a:solidFill>
+                <a:latin typeface="Courier New"/>
+              </a:defRPr>
+            </a:pPr>
+            <a:endParaRPr lang="en-US" dirty="0"/>
+          </a:p>
+          <a:p>
+            <a:pPr>
+              <a:spcAft>
+                <a:spcPts val="100"/>
+              </a:spcAft>
+              <a:defRPr sz="1300">
+                <a:solidFill>
+                  <a:srgbClr val="333333"/>
+                </a:solidFill>
+                <a:latin typeface="Courier New"/>
+              </a:defRPr>
+            </a:pPr>
+            <a:r>
+              <a:rPr lang="en-US" dirty="0"/>
+              <a:t># Intersection 2</a:t>
+            </a:r>
+          </a:p>
+          <a:p>
+            <a:pPr>
+              <a:spcAft>
+                <a:spcPts val="100"/>
+              </a:spcAft>
+              <a:defRPr sz="1300">
+                <a:solidFill>
+                  <a:srgbClr val="333333"/>
+                </a:solidFill>
+                <a:latin typeface="Courier New"/>
+              </a:defRPr>
+            </a:pPr>
+            <a:r>
+              <a:rPr lang="en-US" dirty="0"/>
+              <a:t>print("Driving to intersection 2...")</a:t>
+            </a:r>
+          </a:p>
+          <a:p>
+            <a:pPr>
+              <a:spcAft>
+                <a:spcPts val="100"/>
+              </a:spcAft>
+              <a:defRPr sz="1300">
+                <a:solidFill>
+                  <a:srgbClr val="333333"/>
+                </a:solidFill>
+                <a:latin typeface="Courier New"/>
+              </a:defRPr>
+            </a:pPr>
+            <a:r>
+              <a:rPr lang="en-US" dirty="0"/>
+              <a:t>tracker.track_until_cross()</a:t>
+            </a:r>
+          </a:p>
+          <a:p>
+            <a:pPr>
+              <a:spcAft>
+                <a:spcPts val="100"/>
+              </a:spcAft>
+              <a:defRPr sz="1300">
+                <a:solidFill>
+                  <a:srgbClr val="333333"/>
+                </a:solidFill>
+                <a:latin typeface="Courier New"/>
+              </a:defRPr>
+            </a:pPr>
+            <a:r>
+              <a:rPr lang="en-US" dirty="0"/>
+              <a:t>print("Reached intersection 2!")</a:t>
+            </a:r>
+          </a:p>
+        </p:txBody>
+      </p:sp>
+      <p:sp>
+        <p:nvSpPr>
+          <p:cNvPr id="7" name="TextBox 6"/>
           <p:cNvSpPr txBox="1"/>
           <p:nvPr/>
         </p:nvSpPr>
         <p:spPr>
           <a:xfrm>
-            <a:off x="548640" y="1371600"/>
+            <a:off x="548640" y="5687954"/>
             <a:ext cx="10972800" cy="365760"/>
           </a:xfrm>
           <a:prstGeom prst="rect">
@@ -4889,7 +5595,8 @@
               </a:defRPr>
             </a:pPr>
             <a:r>
-              <a:t>Complete program:</a:t>
+              <a:rPr dirty="0"/>
+              <a:t>This works! But what about 5 intersections? 10?</a:t>
             </a:r>
           </a:p>
           <a:p>
@@ -4904,30 +5611,59 @@
                 <a:latin typeface="Calibri"/>
               </a:defRPr>
             </a:pPr>
-          </a:p>
-        </p:txBody>
-      </p:sp>
-      <p:sp>
-        <p:nvSpPr>
-          <p:cNvPr id="5" name="Rounded Rectangle 4"/>
+            <a:endParaRPr dirty="0"/>
+          </a:p>
+        </p:txBody>
+      </p:sp>
+    </p:spTree>
+    <p:extLst>
+      <p:ext uri="{BB962C8B-B14F-4D97-AF65-F5344CB8AC3E}">
+        <p14:creationId xmlns:p14="http://schemas.microsoft.com/office/powerpoint/2010/main" val="996951293"/>
+      </p:ext>
+    </p:extLst>
+  </p:cSld>
+  <p:clrMapOvr>
+    <a:masterClrMapping/>
+  </p:clrMapOvr>
+</p:sld>
+</file>
+
+<file path=ppt/slides/slide6.xml><?xml version="1.0" encoding="utf-8"?>
+<p:sld xmlns:a="http://schemas.openxmlformats.org/drawingml/2006/main" xmlns:r="http://schemas.openxmlformats.org/officeDocument/2006/relationships" xmlns:p="http://schemas.openxmlformats.org/presentationml/2006/main">
+  <p:cSld>
+    <p:spTree>
+      <p:nvGrpSpPr>
+        <p:cNvPr id="1" name=""/>
+        <p:cNvGrpSpPr/>
+        <p:nvPr/>
+      </p:nvGrpSpPr>
+      <p:grpSpPr>
+        <a:xfrm>
+          <a:off x="0" y="0"/>
+          <a:ext cx="0" cy="0"/>
+          <a:chOff x="0" y="0"/>
+          <a:chExt cx="0" cy="0"/>
+        </a:xfrm>
+      </p:grpSpPr>
+      <p:sp>
+        <p:nvSpPr>
+          <p:cNvPr id="2" name="Rectangle 1"/>
           <p:cNvSpPr/>
           <p:nvPr/>
         </p:nvSpPr>
         <p:spPr>
           <a:xfrm>
-            <a:off x="548640" y="1371600"/>
-            <a:ext cx="10972800" cy="3200400"/>
-          </a:xfrm>
-          <a:prstGeom prst="roundRect">
+            <a:off x="0" y="0"/>
+            <a:ext cx="12191695" cy="1097280"/>
+          </a:xfrm>
+          <a:prstGeom prst="rect">
             <a:avLst/>
           </a:prstGeom>
           <a:solidFill>
-            <a:srgbClr val="F0F0F0"/>
+            <a:srgbClr val="1B3A5C"/>
           </a:solidFill>
-          <a:ln w="12700">
-            <a:solidFill>
-              <a:srgbClr val="999999"/>
-            </a:solidFill>
+          <a:ln>
+            <a:noFill/>
           </a:ln>
         </p:spPr>
         <p:style>
@@ -4949,19 +5685,20 @@
           <a:lstStyle/>
           <a:p>
             <a:pPr algn="ctr"/>
-          </a:p>
-        </p:txBody>
-      </p:sp>
-      <p:sp>
-        <p:nvSpPr>
-          <p:cNvPr id="6" name="TextBox 5"/>
+            <a:endParaRPr/>
+          </a:p>
+        </p:txBody>
+      </p:sp>
+      <p:sp>
+        <p:nvSpPr>
+          <p:cNvPr id="3" name="TextBox 2"/>
           <p:cNvSpPr txBox="1"/>
           <p:nvPr/>
         </p:nvSpPr>
         <p:spPr>
           <a:xfrm>
-            <a:off x="731520" y="1463040"/>
-            <a:ext cx="10607040" cy="3017520"/>
+            <a:off x="548640" y="137160"/>
+            <a:ext cx="10972800" cy="822960"/>
           </a:xfrm>
           <a:prstGeom prst="rect">
             <a:avLst/>
@@ -4975,246 +5712,28 @@
           <a:lstStyle/>
           <a:p>
             <a:pPr>
-              <a:spcAft>
-                <a:spcPts val="100"/>
-              </a:spcAft>
-              <a:defRPr sz="1300">
-                <a:solidFill>
-                  <a:srgbClr val="333333"/>
-                </a:solidFill>
-                <a:latin typeface="Courier New"/>
-              </a:defRPr>
-            </a:pPr>
-            <a:r>
-              <a:t>board.wait_for_button()</a:t>
-            </a:r>
-          </a:p>
-          <a:p>
-            <a:pPr>
-              <a:spcAft>
-                <a:spcPts val="100"/>
-              </a:spcAft>
-              <a:defRPr sz="1300">
-                <a:solidFill>
-                  <a:srgbClr val="333333"/>
-                </a:solidFill>
-                <a:latin typeface="Courier New"/>
-              </a:defRPr>
-            </a:pPr>
-          </a:p>
-          <a:p>
-            <a:pPr>
-              <a:spcAft>
-                <a:spcPts val="100"/>
-              </a:spcAft>
-              <a:defRPr sz="1300">
-                <a:solidFill>
-                  <a:srgbClr val="333333"/>
-                </a:solidFill>
-                <a:latin typeface="Courier New"/>
-              </a:defRPr>
-            </a:pPr>
-            <a:r>
-              <a:t># Intersection 1</a:t>
-            </a:r>
-          </a:p>
-          <a:p>
-            <a:pPr>
-              <a:spcAft>
-                <a:spcPts val="100"/>
-              </a:spcAft>
-              <a:defRPr sz="1300">
-                <a:solidFill>
-                  <a:srgbClr val="333333"/>
-                </a:solidFill>
-                <a:latin typeface="Courier New"/>
-              </a:defRPr>
-            </a:pPr>
-            <a:r>
-              <a:t>print("Driving to intersection 1...")</a:t>
-            </a:r>
-          </a:p>
-          <a:p>
-            <a:pPr>
-              <a:spcAft>
-                <a:spcPts val="100"/>
-              </a:spcAft>
-              <a:defRPr sz="1300">
-                <a:solidFill>
-                  <a:srgbClr val="333333"/>
-                </a:solidFill>
-                <a:latin typeface="Courier New"/>
-              </a:defRPr>
-            </a:pPr>
-            <a:r>
-              <a:t>tracker.track_until_cross()</a:t>
-            </a:r>
-          </a:p>
-          <a:p>
-            <a:pPr>
-              <a:spcAft>
-                <a:spcPts val="100"/>
-              </a:spcAft>
-              <a:defRPr sz="1300">
-                <a:solidFill>
-                  <a:srgbClr val="333333"/>
-                </a:solidFill>
-                <a:latin typeface="Courier New"/>
-              </a:defRPr>
-            </a:pPr>
-            <a:r>
-              <a:t>print("Reached intersection 1!")</a:t>
-            </a:r>
-          </a:p>
-          <a:p>
-            <a:pPr>
-              <a:spcAft>
-                <a:spcPts val="100"/>
-              </a:spcAft>
-              <a:defRPr sz="1300">
-                <a:solidFill>
-                  <a:srgbClr val="333333"/>
-                </a:solidFill>
-                <a:latin typeface="Courier New"/>
-              </a:defRPr>
-            </a:pPr>
-          </a:p>
-          <a:p>
-            <a:pPr>
-              <a:spcAft>
-                <a:spcPts val="100"/>
-              </a:spcAft>
-              <a:defRPr sz="1300">
-                <a:solidFill>
-                  <a:srgbClr val="333333"/>
-                </a:solidFill>
-                <a:latin typeface="Courier New"/>
-              </a:defRPr>
-            </a:pPr>
-            <a:r>
-              <a:t># Clear</a:t>
-            </a:r>
-          </a:p>
-          <a:p>
-            <a:pPr>
-              <a:spcAft>
-                <a:spcPts val="100"/>
-              </a:spcAft>
-              <a:defRPr sz="1300">
-                <a:solidFill>
-                  <a:srgbClr val="333333"/>
-                </a:solidFill>
-                <a:latin typeface="Courier New"/>
-              </a:defRPr>
-            </a:pPr>
-            <a:r>
-              <a:t>tracker.drivetrain.set_effort(0.3, 0.3)</a:t>
-            </a:r>
-          </a:p>
-          <a:p>
-            <a:pPr>
-              <a:spcAft>
-                <a:spcPts val="100"/>
-              </a:spcAft>
-              <a:defRPr sz="1300">
-                <a:solidFill>
-                  <a:srgbClr val="333333"/>
-                </a:solidFill>
-                <a:latin typeface="Courier New"/>
-              </a:defRPr>
-            </a:pPr>
-            <a:r>
-              <a:t>time.sleep(0.3)</a:t>
-            </a:r>
-          </a:p>
-          <a:p>
-            <a:pPr>
-              <a:spcAft>
-                <a:spcPts val="100"/>
-              </a:spcAft>
-              <a:defRPr sz="1300">
-                <a:solidFill>
-                  <a:srgbClr val="333333"/>
-                </a:solidFill>
-                <a:latin typeface="Courier New"/>
-              </a:defRPr>
-            </a:pPr>
-          </a:p>
-          <a:p>
-            <a:pPr>
-              <a:spcAft>
-                <a:spcPts val="100"/>
-              </a:spcAft>
-              <a:defRPr sz="1300">
-                <a:solidFill>
-                  <a:srgbClr val="333333"/>
-                </a:solidFill>
-                <a:latin typeface="Courier New"/>
-              </a:defRPr>
-            </a:pPr>
-            <a:r>
-              <a:t># Intersection 2</a:t>
-            </a:r>
-          </a:p>
-          <a:p>
-            <a:pPr>
-              <a:spcAft>
-                <a:spcPts val="100"/>
-              </a:spcAft>
-              <a:defRPr sz="1300">
-                <a:solidFill>
-                  <a:srgbClr val="333333"/>
-                </a:solidFill>
-                <a:latin typeface="Courier New"/>
-              </a:defRPr>
-            </a:pPr>
-            <a:r>
-              <a:t>print("Driving to intersection 2...")</a:t>
-            </a:r>
-          </a:p>
-          <a:p>
-            <a:pPr>
-              <a:spcAft>
-                <a:spcPts val="100"/>
-              </a:spcAft>
-              <a:defRPr sz="1300">
-                <a:solidFill>
-                  <a:srgbClr val="333333"/>
-                </a:solidFill>
-                <a:latin typeface="Courier New"/>
-              </a:defRPr>
-            </a:pPr>
-            <a:r>
-              <a:t>tracker.track_until_cross()</a:t>
-            </a:r>
-          </a:p>
-          <a:p>
-            <a:pPr>
-              <a:spcAft>
-                <a:spcPts val="100"/>
-              </a:spcAft>
-              <a:defRPr sz="1300">
-                <a:solidFill>
-                  <a:srgbClr val="333333"/>
-                </a:solidFill>
-                <a:latin typeface="Courier New"/>
-              </a:defRPr>
-            </a:pPr>
-            <a:r>
-              <a:t>print("Reached intersection 2!")</a:t>
-            </a:r>
-          </a:p>
-        </p:txBody>
-      </p:sp>
-      <p:sp>
-        <p:nvSpPr>
-          <p:cNvPr id="7" name="TextBox 6"/>
+              <a:defRPr sz="3200" b="1">
+                <a:solidFill>
+                  <a:srgbClr val="FFFFFF"/>
+                </a:solidFill>
+                <a:latin typeface="Calibri"/>
+              </a:defRPr>
+            </a:pPr>
+            <a:r>
+              <a:t>Using a For Loop</a:t>
+            </a:r>
+          </a:p>
+        </p:txBody>
+      </p:sp>
+      <p:sp>
+        <p:nvSpPr>
+          <p:cNvPr id="4" name="TextBox 3"/>
           <p:cNvSpPr txBox="1"/>
           <p:nvPr/>
         </p:nvSpPr>
         <p:spPr>
           <a:xfrm>
-            <a:off x="548640" y="4709160"/>
+            <a:off x="548640" y="1371600"/>
             <a:ext cx="10972800" cy="365760"/>
           </a:xfrm>
           <a:prstGeom prst="rect">
@@ -5240,7 +5759,7 @@
               </a:defRPr>
             </a:pPr>
             <a:r>
-              <a:t>This works! But what about 5 intersections? 10?</a:t>
+              <a:t>A for loop makes it easy to drive any number of intersections:</a:t>
             </a:r>
           </a:p>
           <a:p>
@@ -5255,46 +5774,31 @@
                 <a:latin typeface="Calibri"/>
               </a:defRPr>
             </a:pPr>
-          </a:p>
-        </p:txBody>
-      </p:sp>
-    </p:spTree>
-  </p:cSld>
-  <p:clrMapOvr>
-    <a:masterClrMapping/>
-  </p:clrMapOvr>
-</p:sld>
-</file>
-
-<file path=ppt/slides/slide6.xml><?xml version="1.0" encoding="utf-8"?>
-<p:sld xmlns:a="http://schemas.openxmlformats.org/drawingml/2006/main" xmlns:p="http://schemas.openxmlformats.org/presentationml/2006/main" xmlns:r="http://schemas.openxmlformats.org/officeDocument/2006/relationships">
-  <p:cSld>
-    <p:spTree>
-      <p:nvGrpSpPr>
-        <p:cNvPr id="1" name=""/>
-        <p:cNvGrpSpPr/>
-        <p:nvPr/>
-      </p:nvGrpSpPr>
-      <p:grpSpPr/>
-      <p:sp>
-        <p:nvSpPr>
-          <p:cNvPr id="2" name="Rectangle 1"/>
+            <a:endParaRPr/>
+          </a:p>
+        </p:txBody>
+      </p:sp>
+      <p:sp>
+        <p:nvSpPr>
+          <p:cNvPr id="5" name="Rounded Rectangle 4"/>
           <p:cNvSpPr/>
           <p:nvPr/>
         </p:nvSpPr>
         <p:spPr>
           <a:xfrm>
-            <a:off x="0" y="0"/>
-            <a:ext cx="12191695" cy="1097280"/>
-          </a:xfrm>
-          <a:prstGeom prst="rect">
+            <a:off x="548640" y="1841500"/>
+            <a:ext cx="10972800" cy="2788920"/>
+          </a:xfrm>
+          <a:prstGeom prst="roundRect">
             <a:avLst/>
           </a:prstGeom>
           <a:solidFill>
-            <a:srgbClr val="1B3A5C"/>
+            <a:srgbClr val="F0F0F0"/>
           </a:solidFill>
-          <a:ln>
-            <a:noFill/>
+          <a:ln w="12700">
+            <a:solidFill>
+              <a:srgbClr val="999999"/>
+            </a:solidFill>
           </a:ln>
         </p:spPr>
         <p:style>
@@ -5316,19 +5820,20 @@
           <a:lstStyle/>
           <a:p>
             <a:pPr algn="ctr"/>
-          </a:p>
-        </p:txBody>
-      </p:sp>
-      <p:sp>
-        <p:nvSpPr>
-          <p:cNvPr id="3" name="TextBox 2"/>
+            <a:endParaRPr/>
+          </a:p>
+        </p:txBody>
+      </p:sp>
+      <p:sp>
+        <p:nvSpPr>
+          <p:cNvPr id="6" name="TextBox 5"/>
           <p:cNvSpPr txBox="1"/>
           <p:nvPr/>
         </p:nvSpPr>
         <p:spPr>
           <a:xfrm>
-            <a:off x="548640" y="137160"/>
-            <a:ext cx="10972800" cy="822960"/>
+            <a:off x="731520" y="1932939"/>
+            <a:ext cx="10607040" cy="2606040"/>
           </a:xfrm>
           <a:prstGeom prst="rect">
             <a:avLst/>
@@ -5342,28 +5847,179 @@
           <a:lstStyle/>
           <a:p>
             <a:pPr>
-              <a:defRPr sz="3200" b="1">
-                <a:solidFill>
-                  <a:srgbClr val="FFFFFF"/>
-                </a:solidFill>
-                <a:latin typeface="Calibri"/>
-              </a:defRPr>
-            </a:pPr>
-            <a:r>
-              <a:t>Using a For Loop</a:t>
-            </a:r>
-          </a:p>
-        </p:txBody>
-      </p:sp>
-      <p:sp>
-        <p:nvSpPr>
-          <p:cNvPr id="4" name="TextBox 3"/>
+              <a:spcAft>
+                <a:spcPts val="100"/>
+              </a:spcAft>
+              <a:defRPr sz="1300">
+                <a:solidFill>
+                  <a:srgbClr val="333333"/>
+                </a:solidFill>
+                <a:latin typeface="Courier New"/>
+              </a:defRPr>
+            </a:pPr>
+            <a:r>
+              <a:rPr lang="en-US" dirty="0"/>
+              <a:t>intersections = 3</a:t>
+            </a:r>
+          </a:p>
+          <a:p>
+            <a:pPr>
+              <a:spcAft>
+                <a:spcPts val="100"/>
+              </a:spcAft>
+              <a:defRPr sz="1300">
+                <a:solidFill>
+                  <a:srgbClr val="333333"/>
+                </a:solidFill>
+                <a:latin typeface="Courier New"/>
+              </a:defRPr>
+            </a:pPr>
+            <a:endParaRPr lang="en-US" dirty="0"/>
+          </a:p>
+          <a:p>
+            <a:pPr>
+              <a:spcAft>
+                <a:spcPts val="100"/>
+              </a:spcAft>
+              <a:defRPr sz="1300">
+                <a:solidFill>
+                  <a:srgbClr val="333333"/>
+                </a:solidFill>
+                <a:latin typeface="Courier New"/>
+              </a:defRPr>
+            </a:pPr>
+            <a:r>
+              <a:rPr lang="en-US" dirty="0"/>
+              <a:t>for i in range(intersections):</a:t>
+            </a:r>
+          </a:p>
+          <a:p>
+            <a:pPr>
+              <a:spcAft>
+                <a:spcPts val="100"/>
+              </a:spcAft>
+              <a:defRPr sz="1300">
+                <a:solidFill>
+                  <a:srgbClr val="333333"/>
+                </a:solidFill>
+                <a:latin typeface="Courier New"/>
+              </a:defRPr>
+            </a:pPr>
+            <a:r>
+              <a:rPr lang="en-US" dirty="0"/>
+              <a:t>    print("Driving to intersection", i + 1)</a:t>
+            </a:r>
+          </a:p>
+          <a:p>
+            <a:pPr>
+              <a:spcAft>
+                <a:spcPts val="100"/>
+              </a:spcAft>
+              <a:defRPr sz="1300">
+                <a:solidFill>
+                  <a:srgbClr val="333333"/>
+                </a:solidFill>
+                <a:latin typeface="Courier New"/>
+              </a:defRPr>
+            </a:pPr>
+            <a:r>
+              <a:rPr lang="en-US" dirty="0"/>
+              <a:t>    tracker.track_until_cross()</a:t>
+            </a:r>
+          </a:p>
+          <a:p>
+            <a:pPr>
+              <a:spcAft>
+                <a:spcPts val="100"/>
+              </a:spcAft>
+              <a:defRPr sz="1300">
+                <a:solidFill>
+                  <a:srgbClr val="333333"/>
+                </a:solidFill>
+                <a:latin typeface="Courier New"/>
+              </a:defRPr>
+            </a:pPr>
+            <a:r>
+              <a:rPr lang="en-US" dirty="0"/>
+              <a:t>    print("Reached intersection", i + 1)</a:t>
+            </a:r>
+          </a:p>
+          <a:p>
+            <a:pPr>
+              <a:spcAft>
+                <a:spcPts val="100"/>
+              </a:spcAft>
+              <a:defRPr sz="1300">
+                <a:solidFill>
+                  <a:srgbClr val="333333"/>
+                </a:solidFill>
+                <a:latin typeface="Courier New"/>
+              </a:defRPr>
+            </a:pPr>
+            <a:endParaRPr lang="en-US" dirty="0"/>
+          </a:p>
+          <a:p>
+            <a:pPr>
+              <a:spcAft>
+                <a:spcPts val="100"/>
+              </a:spcAft>
+              <a:defRPr sz="1300">
+                <a:solidFill>
+                  <a:srgbClr val="333333"/>
+                </a:solidFill>
+                <a:latin typeface="Courier New"/>
+              </a:defRPr>
+            </a:pPr>
+            <a:r>
+              <a:rPr lang="en-US" dirty="0"/>
+              <a:t>    # Clear (except after the last one!)</a:t>
+            </a:r>
+          </a:p>
+          <a:p>
+            <a:pPr>
+              <a:spcAft>
+                <a:spcPts val="100"/>
+              </a:spcAft>
+              <a:defRPr sz="1300">
+                <a:solidFill>
+                  <a:srgbClr val="333333"/>
+                </a:solidFill>
+                <a:latin typeface="Courier New"/>
+              </a:defRPr>
+            </a:pPr>
+            <a:r>
+              <a:rPr lang="en-US" dirty="0"/>
+              <a:t>    if i &lt; intersections - 1:</a:t>
+            </a:r>
+          </a:p>
+          <a:p>
+            <a:pPr>
+              <a:spcAft>
+                <a:spcPts val="100"/>
+              </a:spcAft>
+              <a:defRPr sz="1300">
+                <a:solidFill>
+                  <a:srgbClr val="333333"/>
+                </a:solidFill>
+                <a:latin typeface="Courier New"/>
+              </a:defRPr>
+            </a:pPr>
+            <a:r>
+              <a:rPr lang="en-US" dirty="0"/>
+              <a:t>        tracker.drivetrain.straight(3)</a:t>
+            </a:r>
+          </a:p>
+        </p:txBody>
+      </p:sp>
+      <p:sp>
+        <p:nvSpPr>
+          <p:cNvPr id="7" name="TextBox 6"/>
           <p:cNvSpPr txBox="1"/>
           <p:nvPr/>
         </p:nvSpPr>
         <p:spPr>
           <a:xfrm>
-            <a:off x="548640" y="1371600"/>
+            <a:off x="548640" y="4767580"/>
             <a:ext cx="10972800" cy="365760"/>
           </a:xfrm>
           <a:prstGeom prst="rect">
@@ -5389,7 +6045,7 @@
               </a:defRPr>
             </a:pPr>
             <a:r>
-              <a:t>A for loop makes it easy to drive any number of intersections:</a:t>
+              <a:t>Why skip clearing on the last intersection?</a:t>
             </a:r>
           </a:p>
           <a:p>
@@ -5397,6 +6053,38 @@
               <a:spcAft>
                 <a:spcPts val="400"/>
               </a:spcAft>
+              <a:defRPr sz="1700" b="0">
+                <a:solidFill>
+                  <a:srgbClr val="000000"/>
+                </a:solidFill>
+                <a:latin typeface="Calibri"/>
+              </a:defRPr>
+            </a:pPr>
+            <a:r>
+              <a:t>We want to STOP at the final intersection</a:t>
+            </a:r>
+          </a:p>
+          <a:p>
+            <a:pPr>
+              <a:spcAft>
+                <a:spcPts val="400"/>
+              </a:spcAft>
+              <a:defRPr sz="1700" b="0">
+                <a:solidFill>
+                  <a:srgbClr val="000000"/>
+                </a:solidFill>
+                <a:latin typeface="Calibri"/>
+              </a:defRPr>
+            </a:pPr>
+            <a:r>
+              <a:t>That's where we'll turn or end the program</a:t>
+            </a:r>
+          </a:p>
+          <a:p>
+            <a:pPr>
+              <a:spcAft>
+                <a:spcPts val="400"/>
+              </a:spcAft>
               <a:defRPr sz="400" b="0">
                 <a:solidFill>
                   <a:srgbClr val="000000"/>
@@ -5404,30 +6092,59 @@
                 <a:latin typeface="Calibri"/>
               </a:defRPr>
             </a:pPr>
-          </a:p>
-        </p:txBody>
-      </p:sp>
-      <p:sp>
-        <p:nvSpPr>
-          <p:cNvPr id="5" name="Rounded Rectangle 4"/>
+            <a:endParaRPr/>
+          </a:p>
+        </p:txBody>
+      </p:sp>
+    </p:spTree>
+    <p:extLst>
+      <p:ext uri="{BB962C8B-B14F-4D97-AF65-F5344CB8AC3E}">
+        <p14:creationId xmlns:p14="http://schemas.microsoft.com/office/powerpoint/2010/main" val="3075764804"/>
+      </p:ext>
+    </p:extLst>
+  </p:cSld>
+  <p:clrMapOvr>
+    <a:masterClrMapping/>
+  </p:clrMapOvr>
+</p:sld>
+</file>
+
+<file path=ppt/slides/slide7.xml><?xml version="1.0" encoding="utf-8"?>
+<p:sld xmlns:a="http://schemas.openxmlformats.org/drawingml/2006/main" xmlns:r="http://schemas.openxmlformats.org/officeDocument/2006/relationships" xmlns:p="http://schemas.openxmlformats.org/presentationml/2006/main">
+  <p:cSld>
+    <p:spTree>
+      <p:nvGrpSpPr>
+        <p:cNvPr id="1" name=""/>
+        <p:cNvGrpSpPr/>
+        <p:nvPr/>
+      </p:nvGrpSpPr>
+      <p:grpSpPr>
+        <a:xfrm>
+          <a:off x="0" y="0"/>
+          <a:ext cx="0" cy="0"/>
+          <a:chOff x="0" y="0"/>
+          <a:chExt cx="0" cy="0"/>
+        </a:xfrm>
+      </p:grpSpPr>
+      <p:sp>
+        <p:nvSpPr>
+          <p:cNvPr id="2" name="Rectangle 1"/>
           <p:cNvSpPr/>
           <p:nvPr/>
         </p:nvSpPr>
         <p:spPr>
           <a:xfrm>
-            <a:off x="548640" y="1371600"/>
-            <a:ext cx="10972800" cy="2788920"/>
-          </a:xfrm>
-          <a:prstGeom prst="roundRect">
+            <a:off x="0" y="0"/>
+            <a:ext cx="12191695" cy="1097280"/>
+          </a:xfrm>
+          <a:prstGeom prst="rect">
             <a:avLst/>
           </a:prstGeom>
           <a:solidFill>
-            <a:srgbClr val="F0F0F0"/>
+            <a:srgbClr val="1B3A5C"/>
           </a:solidFill>
-          <a:ln w="12700">
-            <a:solidFill>
-              <a:srgbClr val="999999"/>
-            </a:solidFill>
+          <a:ln>
+            <a:noFill/>
           </a:ln>
         </p:spPr>
         <p:style>
@@ -5449,19 +6166,20 @@
           <a:lstStyle/>
           <a:p>
             <a:pPr algn="ctr"/>
-          </a:p>
-        </p:txBody>
-      </p:sp>
-      <p:sp>
-        <p:nvSpPr>
-          <p:cNvPr id="6" name="TextBox 5"/>
+            <a:endParaRPr/>
+          </a:p>
+        </p:txBody>
+      </p:sp>
+      <p:sp>
+        <p:nvSpPr>
+          <p:cNvPr id="3" name="TextBox 2"/>
           <p:cNvSpPr txBox="1"/>
           <p:nvPr/>
         </p:nvSpPr>
         <p:spPr>
           <a:xfrm>
-            <a:off x="731520" y="1463040"/>
-            <a:ext cx="10607040" cy="2606040"/>
+            <a:off x="548640" y="137160"/>
+            <a:ext cx="10972800" cy="822960"/>
           </a:xfrm>
           <a:prstGeom prst="rect">
             <a:avLst/>
@@ -5475,185 +6193,28 @@
           <a:lstStyle/>
           <a:p>
             <a:pPr>
-              <a:spcAft>
-                <a:spcPts val="100"/>
-              </a:spcAft>
-              <a:defRPr sz="1300">
-                <a:solidFill>
-                  <a:srgbClr val="333333"/>
-                </a:solidFill>
-                <a:latin typeface="Courier New"/>
-              </a:defRPr>
-            </a:pPr>
-            <a:r>
-              <a:t>intersections = 3</a:t>
-            </a:r>
-          </a:p>
-          <a:p>
-            <a:pPr>
-              <a:spcAft>
-                <a:spcPts val="100"/>
-              </a:spcAft>
-              <a:defRPr sz="1300">
-                <a:solidFill>
-                  <a:srgbClr val="333333"/>
-                </a:solidFill>
-                <a:latin typeface="Courier New"/>
-              </a:defRPr>
-            </a:pPr>
-          </a:p>
-          <a:p>
-            <a:pPr>
-              <a:spcAft>
-                <a:spcPts val="100"/>
-              </a:spcAft>
-              <a:defRPr sz="1300">
-                <a:solidFill>
-                  <a:srgbClr val="333333"/>
-                </a:solidFill>
-                <a:latin typeface="Courier New"/>
-              </a:defRPr>
-            </a:pPr>
-            <a:r>
-              <a:t>for i in range(intersections):</a:t>
-            </a:r>
-          </a:p>
-          <a:p>
-            <a:pPr>
-              <a:spcAft>
-                <a:spcPts val="100"/>
-              </a:spcAft>
-              <a:defRPr sz="1300">
-                <a:solidFill>
-                  <a:srgbClr val="333333"/>
-                </a:solidFill>
-                <a:latin typeface="Courier New"/>
-              </a:defRPr>
-            </a:pPr>
-            <a:r>
-              <a:t>    print("Driving to intersection", i + 1)</a:t>
-            </a:r>
-          </a:p>
-          <a:p>
-            <a:pPr>
-              <a:spcAft>
-                <a:spcPts val="100"/>
-              </a:spcAft>
-              <a:defRPr sz="1300">
-                <a:solidFill>
-                  <a:srgbClr val="333333"/>
-                </a:solidFill>
-                <a:latin typeface="Courier New"/>
-              </a:defRPr>
-            </a:pPr>
-            <a:r>
-              <a:t>    tracker.track_until_cross()</a:t>
-            </a:r>
-          </a:p>
-          <a:p>
-            <a:pPr>
-              <a:spcAft>
-                <a:spcPts val="100"/>
-              </a:spcAft>
-              <a:defRPr sz="1300">
-                <a:solidFill>
-                  <a:srgbClr val="333333"/>
-                </a:solidFill>
-                <a:latin typeface="Courier New"/>
-              </a:defRPr>
-            </a:pPr>
-            <a:r>
-              <a:t>    print("Reached intersection", i + 1)</a:t>
-            </a:r>
-          </a:p>
-          <a:p>
-            <a:pPr>
-              <a:spcAft>
-                <a:spcPts val="100"/>
-              </a:spcAft>
-              <a:defRPr sz="1300">
-                <a:solidFill>
-                  <a:srgbClr val="333333"/>
-                </a:solidFill>
-                <a:latin typeface="Courier New"/>
-              </a:defRPr>
-            </a:pPr>
-          </a:p>
-          <a:p>
-            <a:pPr>
-              <a:spcAft>
-                <a:spcPts val="100"/>
-              </a:spcAft>
-              <a:defRPr sz="1300">
-                <a:solidFill>
-                  <a:srgbClr val="333333"/>
-                </a:solidFill>
-                <a:latin typeface="Courier New"/>
-              </a:defRPr>
-            </a:pPr>
-            <a:r>
-              <a:t>    # Clear (except after the last one!)</a:t>
-            </a:r>
-          </a:p>
-          <a:p>
-            <a:pPr>
-              <a:spcAft>
-                <a:spcPts val="100"/>
-              </a:spcAft>
-              <a:defRPr sz="1300">
-                <a:solidFill>
-                  <a:srgbClr val="333333"/>
-                </a:solidFill>
-                <a:latin typeface="Courier New"/>
-              </a:defRPr>
-            </a:pPr>
-            <a:r>
-              <a:t>    if i &lt; intersections - 1:</a:t>
-            </a:r>
-          </a:p>
-          <a:p>
-            <a:pPr>
-              <a:spcAft>
-                <a:spcPts val="100"/>
-              </a:spcAft>
-              <a:defRPr sz="1300">
-                <a:solidFill>
-                  <a:srgbClr val="333333"/>
-                </a:solidFill>
-                <a:latin typeface="Courier New"/>
-              </a:defRPr>
-            </a:pPr>
-            <a:r>
-              <a:t>        tracker.drivetrain.set_effort(0.3, 0.3)</a:t>
-            </a:r>
-          </a:p>
-          <a:p>
-            <a:pPr>
-              <a:spcAft>
-                <a:spcPts val="100"/>
-              </a:spcAft>
-              <a:defRPr sz="1300">
-                <a:solidFill>
-                  <a:srgbClr val="333333"/>
-                </a:solidFill>
-                <a:latin typeface="Courier New"/>
-              </a:defRPr>
-            </a:pPr>
-            <a:r>
-              <a:t>        time.sleep(0.3)</a:t>
-            </a:r>
-          </a:p>
-        </p:txBody>
-      </p:sp>
-      <p:sp>
-        <p:nvSpPr>
-          <p:cNvPr id="7" name="TextBox 6"/>
+              <a:defRPr sz="3200" b="1">
+                <a:solidFill>
+                  <a:srgbClr val="FFFFFF"/>
+                </a:solidFill>
+                <a:latin typeface="Calibri"/>
+              </a:defRPr>
+            </a:pPr>
+            <a:r>
+              <a:t>Tracing the Loop</a:t>
+            </a:r>
+          </a:p>
+        </p:txBody>
+      </p:sp>
+      <p:sp>
+        <p:nvSpPr>
+          <p:cNvPr id="4" name="TextBox 3"/>
           <p:cNvSpPr txBox="1"/>
           <p:nvPr/>
         </p:nvSpPr>
         <p:spPr>
           <a:xfrm>
-            <a:off x="548640" y="4297680"/>
+            <a:off x="548640" y="1371600"/>
             <a:ext cx="10972800" cy="365760"/>
           </a:xfrm>
           <a:prstGeom prst="rect">
@@ -5671,7 +6232,7 @@
               <a:spcAft>
                 <a:spcPts val="400"/>
               </a:spcAft>
-              <a:defRPr sz="2000" b="1">
+              <a:defRPr sz="1800" b="1">
                 <a:solidFill>
                   <a:srgbClr val="1B3A5C"/>
                 </a:solidFill>
@@ -5679,7 +6240,7 @@
               </a:defRPr>
             </a:pPr>
             <a:r>
-              <a:t>Why skip clearing on the last intersection?</a:t>
+              <a:t>For intersections = 3:</a:t>
             </a:r>
           </a:p>
           <a:p>
@@ -5687,194 +6248,14 @@
               <a:spcAft>
                 <a:spcPts val="400"/>
               </a:spcAft>
-              <a:defRPr sz="1700" b="0">
+              <a:defRPr sz="400" b="0">
                 <a:solidFill>
                   <a:srgbClr val="000000"/>
                 </a:solidFill>
                 <a:latin typeface="Calibri"/>
               </a:defRPr>
             </a:pPr>
-            <a:r>
-              <a:t>We want to STOP at the final intersection</a:t>
-            </a:r>
-          </a:p>
-          <a:p>
-            <a:pPr>
-              <a:spcAft>
-                <a:spcPts val="400"/>
-              </a:spcAft>
-              <a:defRPr sz="1700" b="0">
-                <a:solidFill>
-                  <a:srgbClr val="000000"/>
-                </a:solidFill>
-                <a:latin typeface="Calibri"/>
-              </a:defRPr>
-            </a:pPr>
-            <a:r>
-              <a:t>That's where we'll turn or end the program</a:t>
-            </a:r>
-          </a:p>
-          <a:p>
-            <a:pPr>
-              <a:spcAft>
-                <a:spcPts val="400"/>
-              </a:spcAft>
-              <a:defRPr sz="400" b="0">
-                <a:solidFill>
-                  <a:srgbClr val="000000"/>
-                </a:solidFill>
-                <a:latin typeface="Calibri"/>
-              </a:defRPr>
-            </a:pPr>
-          </a:p>
-        </p:txBody>
-      </p:sp>
-    </p:spTree>
-  </p:cSld>
-  <p:clrMapOvr>
-    <a:masterClrMapping/>
-  </p:clrMapOvr>
-</p:sld>
-</file>
-
-<file path=ppt/slides/slide7.xml><?xml version="1.0" encoding="utf-8"?>
-<p:sld xmlns:a="http://schemas.openxmlformats.org/drawingml/2006/main" xmlns:p="http://schemas.openxmlformats.org/presentationml/2006/main" xmlns:r="http://schemas.openxmlformats.org/officeDocument/2006/relationships">
-  <p:cSld>
-    <p:spTree>
-      <p:nvGrpSpPr>
-        <p:cNvPr id="1" name=""/>
-        <p:cNvGrpSpPr/>
-        <p:nvPr/>
-      </p:nvGrpSpPr>
-      <p:grpSpPr/>
-      <p:sp>
-        <p:nvSpPr>
-          <p:cNvPr id="2" name="Rectangle 1"/>
-          <p:cNvSpPr/>
-          <p:nvPr/>
-        </p:nvSpPr>
-        <p:spPr>
-          <a:xfrm>
-            <a:off x="0" y="0"/>
-            <a:ext cx="12191695" cy="1097280"/>
-          </a:xfrm>
-          <a:prstGeom prst="rect">
-            <a:avLst/>
-          </a:prstGeom>
-          <a:solidFill>
-            <a:srgbClr val="1B3A5C"/>
-          </a:solidFill>
-          <a:ln>
-            <a:noFill/>
-          </a:ln>
-        </p:spPr>
-        <p:style>
-          <a:lnRef idx="1">
-            <a:schemeClr val="accent1"/>
-          </a:lnRef>
-          <a:fillRef idx="3">
-            <a:schemeClr val="accent1"/>
-          </a:fillRef>
-          <a:effectRef idx="2">
-            <a:schemeClr val="accent1"/>
-          </a:effectRef>
-          <a:fontRef idx="minor">
-            <a:schemeClr val="lt1"/>
-          </a:fontRef>
-        </p:style>
-        <p:txBody>
-          <a:bodyPr rtlCol="0" anchor="ctr"/>
-          <a:lstStyle/>
-          <a:p>
-            <a:pPr algn="ctr"/>
-          </a:p>
-        </p:txBody>
-      </p:sp>
-      <p:sp>
-        <p:nvSpPr>
-          <p:cNvPr id="3" name="TextBox 2"/>
-          <p:cNvSpPr txBox="1"/>
-          <p:nvPr/>
-        </p:nvSpPr>
-        <p:spPr>
-          <a:xfrm>
-            <a:off x="548640" y="137160"/>
-            <a:ext cx="10972800" cy="822960"/>
-          </a:xfrm>
-          <a:prstGeom prst="rect">
-            <a:avLst/>
-          </a:prstGeom>
-          <a:noFill/>
-        </p:spPr>
-        <p:txBody>
-          <a:bodyPr wrap="square">
-            <a:spAutoFit/>
-          </a:bodyPr>
-          <a:lstStyle/>
-          <a:p>
-            <a:pPr>
-              <a:defRPr sz="3200" b="1">
-                <a:solidFill>
-                  <a:srgbClr val="FFFFFF"/>
-                </a:solidFill>
-                <a:latin typeface="Calibri"/>
-              </a:defRPr>
-            </a:pPr>
-            <a:r>
-              <a:t>Tracing the Loop</a:t>
-            </a:r>
-          </a:p>
-        </p:txBody>
-      </p:sp>
-      <p:sp>
-        <p:nvSpPr>
-          <p:cNvPr id="4" name="TextBox 3"/>
-          <p:cNvSpPr txBox="1"/>
-          <p:nvPr/>
-        </p:nvSpPr>
-        <p:spPr>
-          <a:xfrm>
-            <a:off x="548640" y="1371600"/>
-            <a:ext cx="10972800" cy="365760"/>
-          </a:xfrm>
-          <a:prstGeom prst="rect">
-            <a:avLst/>
-          </a:prstGeom>
-          <a:noFill/>
-        </p:spPr>
-        <p:txBody>
-          <a:bodyPr wrap="square">
-            <a:spAutoFit/>
-          </a:bodyPr>
-          <a:lstStyle/>
-          <a:p>
-            <a:pPr>
-              <a:spcAft>
-                <a:spcPts val="400"/>
-              </a:spcAft>
-              <a:defRPr sz="1800" b="1">
-                <a:solidFill>
-                  <a:srgbClr val="1B3A5C"/>
-                </a:solidFill>
-                <a:latin typeface="Calibri"/>
-              </a:defRPr>
-            </a:pPr>
-            <a:r>
-              <a:t>For intersections = 3:</a:t>
-            </a:r>
-          </a:p>
-          <a:p>
-            <a:pPr>
-              <a:spcAft>
-                <a:spcPts val="400"/>
-              </a:spcAft>
-              <a:defRPr sz="400" b="0">
-                <a:solidFill>
-                  <a:srgbClr val="000000"/>
-                </a:solidFill>
-                <a:latin typeface="Calibri"/>
-              </a:defRPr>
-            </a:pPr>
+            <a:endParaRPr/>
           </a:p>
         </p:txBody>
       </p:sp>
@@ -5884,10 +6265,16 @@
           <p:cNvGraphicFramePr>
             <a:graphicFrameLocks noGrp="1"/>
           </p:cNvGraphicFramePr>
-          <p:nvPr/>
+          <p:nvPr>
+            <p:extLst>
+              <p:ext uri="{D42A27DB-BD31-4B8C-83A1-F6EECF244321}">
+                <p14:modId xmlns:p14="http://schemas.microsoft.com/office/powerpoint/2010/main" val="507121811"/>
+              </p:ext>
+            </p:extLst>
+          </p:nvPr>
         </p:nvGraphicFramePr>
         <p:xfrm>
-          <a:off x="914400" y="1371600"/>
+          <a:off x="914400" y="1841500"/>
           <a:ext cx="10058400" cy="1463040"/>
         </p:xfrm>
         <a:graphic>
@@ -5897,9 +6284,27 @@
                 <a:tableStyleId>{5C22544A-7EE6-4342-B048-85BDC9FD1C3A}</a:tableStyleId>
               </a:tblPr>
               <a:tblGrid>
-                <a:gridCol w="3352800"/>
-                <a:gridCol w="3352800"/>
-                <a:gridCol w="3352800"/>
+                <a:gridCol w="3352800">
+                  <a:extLst>
+                    <a:ext uri="{9D8B030D-6E8A-4147-A177-3AD203B41FA5}">
+                      <a16:colId xmlns:a16="http://schemas.microsoft.com/office/drawing/2014/main" val="20000"/>
+                    </a:ext>
+                  </a:extLst>
+                </a:gridCol>
+                <a:gridCol w="3352800">
+                  <a:extLst>
+                    <a:ext uri="{9D8B030D-6E8A-4147-A177-3AD203B41FA5}">
+                      <a16:colId xmlns:a16="http://schemas.microsoft.com/office/drawing/2014/main" val="20001"/>
+                    </a:ext>
+                  </a:extLst>
+                </a:gridCol>
+                <a:gridCol w="3352800">
+                  <a:extLst>
+                    <a:ext uri="{9D8B030D-6E8A-4147-A177-3AD203B41FA5}">
+                      <a16:colId xmlns:a16="http://schemas.microsoft.com/office/drawing/2014/main" val="20002"/>
+                    </a:ext>
+                  </a:extLst>
+                </a:gridCol>
               </a:tblGrid>
               <a:tr h="365760">
                 <a:tc>
@@ -5974,6 +6379,11 @@
                     </a:solidFill>
                   </a:tcPr>
                 </a:tc>
+                <a:extLst>
+                  <a:ext uri="{0D108BD9-81ED-4DB2-BD59-A6C34878D82A}">
+                    <a16:rowId xmlns:a16="http://schemas.microsoft.com/office/drawing/2014/main" val="10000"/>
+                  </a:ext>
+                </a:extLst>
               </a:tr>
               <a:tr h="365760">
                 <a:tc>
@@ -6027,6 +6437,11 @@
                   </a:txBody>
                   <a:tcPr/>
                 </a:tc>
+                <a:extLst>
+                  <a:ext uri="{0D108BD9-81ED-4DB2-BD59-A6C34878D82A}">
+                    <a16:rowId xmlns:a16="http://schemas.microsoft.com/office/drawing/2014/main" val="10001"/>
+                  </a:ext>
+                </a:extLst>
               </a:tr>
               <a:tr h="365760">
                 <a:tc>
@@ -6092,6 +6507,11 @@
                     </a:solidFill>
                   </a:tcPr>
                 </a:tc>
+                <a:extLst>
+                  <a:ext uri="{0D108BD9-81ED-4DB2-BD59-A6C34878D82A}">
+                    <a16:rowId xmlns:a16="http://schemas.microsoft.com/office/drawing/2014/main" val="10002"/>
+                  </a:ext>
+                </a:extLst>
               </a:tr>
               <a:tr h="365760">
                 <a:tc>
@@ -6145,6 +6565,11 @@
                   </a:txBody>
                   <a:tcPr/>
                 </a:tc>
+                <a:extLst>
+                  <a:ext uri="{0D108BD9-81ED-4DB2-BD59-A6C34878D82A}">
+                    <a16:rowId xmlns:a16="http://schemas.microsoft.com/office/drawing/2014/main" val="10003"/>
+                  </a:ext>
+                </a:extLst>
               </a:tr>
             </a:tbl>
           </a:graphicData>
@@ -6158,7 +6583,7 @@
         </p:nvSpPr>
         <p:spPr>
           <a:xfrm>
-            <a:off x="548640" y="3017520"/>
+            <a:off x="548640" y="3487420"/>
             <a:ext cx="10972800" cy="365760"/>
           </a:xfrm>
           <a:prstGeom prst="rect">
@@ -6199,6 +6624,7 @@
                 <a:latin typeface="Calibri"/>
               </a:defRPr>
             </a:pPr>
+            <a:endParaRPr/>
           </a:p>
           <a:p>
             <a:pPr>
@@ -6228,6 +6654,7 @@
                 <a:latin typeface="Calibri"/>
               </a:defRPr>
             </a:pPr>
+            <a:endParaRPr/>
           </a:p>
         </p:txBody>
       </p:sp>
@@ -6240,7 +6667,7 @@
 </file>
 
 <file path=ppt/slides/slide8.xml><?xml version="1.0" encoding="utf-8"?>
-<p:sld xmlns:a="http://schemas.openxmlformats.org/drawingml/2006/main" xmlns:p="http://schemas.openxmlformats.org/presentationml/2006/main" xmlns:r="http://schemas.openxmlformats.org/officeDocument/2006/relationships">
+<p:sld xmlns:a="http://schemas.openxmlformats.org/drawingml/2006/main" xmlns:r="http://schemas.openxmlformats.org/officeDocument/2006/relationships" xmlns:p="http://schemas.openxmlformats.org/presentationml/2006/main">
   <p:cSld>
     <p:spTree>
       <p:nvGrpSpPr>
@@ -6248,7 +6675,14 @@
         <p:cNvGrpSpPr/>
         <p:nvPr/>
       </p:nvGrpSpPr>
-      <p:grpSpPr/>
+      <p:grpSpPr>
+        <a:xfrm>
+          <a:off x="0" y="0"/>
+          <a:ext cx="0" cy="0"/>
+          <a:chOff x="0" y="0"/>
+          <a:chExt cx="0" cy="0"/>
+        </a:xfrm>
+      </p:grpSpPr>
       <p:sp>
         <p:nvSpPr>
           <p:cNvPr id="2" name="Rectangle 1"/>
@@ -6289,6 +6723,7 @@
           <a:lstStyle/>
           <a:p>
             <a:pPr algn="ctr"/>
+            <a:endParaRPr/>
           </a:p>
         </p:txBody>
       </p:sp>
@@ -6444,8 +6879,8 @@
         </p:nvSpPr>
         <p:spPr>
           <a:xfrm>
-            <a:off x="548640" y="2194560"/>
-            <a:ext cx="5303520" cy="1645920"/>
+            <a:off x="548640" y="2374900"/>
+            <a:ext cx="6241100" cy="1645920"/>
           </a:xfrm>
           <a:prstGeom prst="roundRect">
             <a:avLst/>
@@ -6478,6 +6913,7 @@
           <a:lstStyle/>
           <a:p>
             <a:pPr algn="ctr"/>
+            <a:endParaRPr/>
           </a:p>
         </p:txBody>
       </p:sp>
@@ -6489,8 +6925,8 @@
         </p:nvSpPr>
         <p:spPr>
           <a:xfrm>
-            <a:off x="731520" y="2286000"/>
-            <a:ext cx="4937760" cy="1463040"/>
+            <a:off x="731520" y="2463800"/>
+            <a:ext cx="6058220" cy="1356782"/>
           </a:xfrm>
           <a:prstGeom prst="rect">
             <a:avLst/>
@@ -6515,6 +6951,7 @@
               </a:defRPr>
             </a:pPr>
             <a:r>
+              <a:rPr lang="en-US" dirty="0"/>
               <a:t>def drive_intersections(tracker, count):</a:t>
             </a:r>
           </a:p>
@@ -6531,6 +6968,7 @@
               </a:defRPr>
             </a:pPr>
             <a:r>
+              <a:rPr lang="en-US" dirty="0"/>
               <a:t>    for i in range(count):</a:t>
             </a:r>
           </a:p>
@@ -6547,6 +6985,7 @@
               </a:defRPr>
             </a:pPr>
             <a:r>
+              <a:rPr lang="en-US" dirty="0"/>
               <a:t>        tracker.track_until_cross()</a:t>
             </a:r>
           </a:p>
@@ -6563,6 +7002,7 @@
               </a:defRPr>
             </a:pPr>
             <a:r>
+              <a:rPr lang="en-US" dirty="0"/>
               <a:t>        if i &lt; count - 1:</a:t>
             </a:r>
           </a:p>
@@ -6579,23 +7019,8 @@
               </a:defRPr>
             </a:pPr>
             <a:r>
-              <a:t>            tracker.drivetrain.set_effort(0.3, 0.3)</a:t>
-            </a:r>
-          </a:p>
-          <a:p>
-            <a:pPr>
-              <a:spcAft>
-                <a:spcPts val="100"/>
-              </a:spcAft>
-              <a:defRPr sz="1300">
-                <a:solidFill>
-                  <a:srgbClr val="333333"/>
-                </a:solidFill>
-                <a:latin typeface="Courier New"/>
-              </a:defRPr>
-            </a:pPr>
-            <a:r>
-              <a:t>            time.sleep(0.3)</a:t>
+              <a:rPr lang="en-US" dirty="0"/>
+              <a:t>            tracker.drivetrain.straight(3)</a:t>
             </a:r>
           </a:p>
         </p:txBody>
@@ -6608,8 +7033,8 @@
         </p:nvSpPr>
         <p:spPr>
           <a:xfrm>
-            <a:off x="6217920" y="2194560"/>
-            <a:ext cx="5303520" cy="1645920"/>
+            <a:off x="548640" y="4572001"/>
+            <a:ext cx="6241100" cy="1645920"/>
           </a:xfrm>
           <a:prstGeom prst="roundRect">
             <a:avLst/>
@@ -6642,6 +7067,7 @@
           <a:lstStyle/>
           <a:p>
             <a:pPr algn="ctr"/>
+            <a:endParaRPr/>
           </a:p>
         </p:txBody>
       </p:sp>
@@ -6653,8 +7079,8 @@
         </p:nvSpPr>
         <p:spPr>
           <a:xfrm>
-            <a:off x="6400800" y="2286000"/>
-            <a:ext cx="4937760" cy="1463040"/>
+            <a:off x="731519" y="4660901"/>
+            <a:ext cx="6058221" cy="505267"/>
           </a:xfrm>
           <a:prstGeom prst="rect">
             <a:avLst/>
@@ -6679,7 +7105,12 @@
               </a:defRPr>
             </a:pPr>
             <a:r>
-              <a:t>drive_intersections(tracker, 2)   # Drive 2 intersections</a:t>
+              <a:rPr dirty="0" err="1"/>
+              <a:t>drive_intersections</a:t>
+            </a:r>
+            <a:r>
+              <a:rPr dirty="0"/>
+              <a:t>(tracker, 2)   # Drive 2 intersections</a:t>
             </a:r>
           </a:p>
           <a:p>
@@ -6695,12 +7126,22 @@
               </a:defRPr>
             </a:pPr>
             <a:r>
-              <a:t>drive_intersections(tracker, 4)   # Drive 4 intersections</a:t>
+              <a:rPr dirty="0" err="1"/>
+              <a:t>drive_intersections</a:t>
+            </a:r>
+            <a:r>
+              <a:rPr dirty="0"/>
+              <a:t>(tracker, 4)   # Drive 4 intersections</a:t>
             </a:r>
           </a:p>
         </p:txBody>
       </p:sp>
     </p:spTree>
+    <p:extLst>
+      <p:ext uri="{BB962C8B-B14F-4D97-AF65-F5344CB8AC3E}">
+        <p14:creationId xmlns:p14="http://schemas.microsoft.com/office/powerpoint/2010/main" val="2844740632"/>
+      </p:ext>
+    </p:extLst>
   </p:cSld>
   <p:clrMapOvr>
     <a:masterClrMapping/>
@@ -6709,7 +7150,7 @@
 </file>
 
 <file path=ppt/slides/slide9.xml><?xml version="1.0" encoding="utf-8"?>
-<p:sld xmlns:a="http://schemas.openxmlformats.org/drawingml/2006/main" xmlns:p="http://schemas.openxmlformats.org/presentationml/2006/main" xmlns:r="http://schemas.openxmlformats.org/officeDocument/2006/relationships">
+<p:sld xmlns:a="http://schemas.openxmlformats.org/drawingml/2006/main" xmlns:r="http://schemas.openxmlformats.org/officeDocument/2006/relationships" xmlns:p="http://schemas.openxmlformats.org/presentationml/2006/main">
   <p:cSld>
     <p:spTree>
       <p:nvGrpSpPr>
@@ -6717,7 +7158,14 @@
         <p:cNvGrpSpPr/>
         <p:nvPr/>
       </p:nvGrpSpPr>
-      <p:grpSpPr/>
+      <p:grpSpPr>
+        <a:xfrm>
+          <a:off x="0" y="0"/>
+          <a:ext cx="0" cy="0"/>
+          <a:chOff x="0" y="0"/>
+          <a:chExt cx="0" cy="0"/>
+        </a:xfrm>
+      </p:grpSpPr>
       <p:sp>
         <p:nvSpPr>
           <p:cNvPr id="2" name="Rectangle 1"/>
@@ -6758,6 +7206,7 @@
           <a:lstStyle/>
           <a:p>
             <a:pPr algn="ctr"/>
+            <a:endParaRPr/>
           </a:p>
         </p:txBody>
       </p:sp>
@@ -6910,6 +7359,7 @@
                 <a:latin typeface="Calibri"/>
               </a:defRPr>
             </a:pPr>
+            <a:endParaRPr/>
           </a:p>
           <a:p>
             <a:pPr>
@@ -6987,6 +7437,7 @@
                 <a:latin typeface="Calibri"/>
               </a:defRPr>
             </a:pPr>
+            <a:endParaRPr/>
           </a:p>
           <a:p>
             <a:pPr>
@@ -7064,6 +7515,7 @@
                 <a:latin typeface="Calibri"/>
               </a:defRPr>
             </a:pPr>
+            <a:endParaRPr/>
           </a:p>
         </p:txBody>
       </p:sp>
@@ -7393,4 +7845,24 @@
   </a:objectDefaults>
   <a:extraClrSchemeLst/>
 </a:theme>
+</file>
+
+<file path=ppt/webextensions/taskpanes.xml><?xml version="1.0" encoding="utf-8"?>
+<wetp:taskpanes xmlns:wetp="http://schemas.microsoft.com/office/webextensions/taskpanes/2010/11">
+  <wetp:taskpane dockstate="right" visibility="0" width="350" row="0">
+    <wetp:webextensionref xmlns:r="http://schemas.openxmlformats.org/officeDocument/2006/relationships" r:id="rId1"/>
+  </wetp:taskpane>
+</wetp:taskpanes>
+</file>
+
+<file path=ppt/webextensions/webextension1.xml><?xml version="1.0" encoding="utf-8"?>
+<we:webextension xmlns:we="http://schemas.microsoft.com/office/webextensions/webextension/2010/11" id="{AC45371C-A218-3840-8863-245874005D6B}">
+  <we:reference id="WA200010001" version="1.0.0.1" store="Omex" storeType="OMEX"/>
+  <we:alternateReferences>
+    <we:reference id="WA200010001" version="1.0.0.1" store="WA200010001" storeType="OMEX"/>
+  </we:alternateReferences>
+  <we:properties/>
+  <we:bindings/>
+  <we:snapshot xmlns:r="http://schemas.openxmlformats.org/officeDocument/2006/relationships"/>
+</we:webextension>
 </file>